--- a/Galileo_Payment_Analyzer.pptx
+++ b/Galileo_Payment_Analyzer.pptx
@@ -13,6 +13,10 @@
     <p:sldId id="261" r:id="rId12"/>
     <p:sldId id="262" r:id="rId13"/>
     <p:sldId id="263" r:id="rId14"/>
+    <p:sldId id="264" r:id="rId15"/>
+    <p:sldId id="265" r:id="rId16"/>
+    <p:sldId id="266" r:id="rId17"/>
+    <p:sldId id="267" r:id="rId18"/>
   </p:sldIdLst>
   <p:sldSz cx="12191695" cy="6858000" type="screen4x3"/>
   <p:notesSz cx="6858000" cy="9144000"/>
@@ -3249,7 +3253,7 @@
 </p:sld>
 </file>
 
-<file path=ppt/slides/slide2.xml><?xml version="1.0" encoding="utf-8"?>
+<file path=ppt/slides/slide10.xml><?xml version="1.0" encoding="utf-8"?>
 <p:sld xmlns:a="http://schemas.openxmlformats.org/drawingml/2006/main" xmlns:p="http://schemas.openxmlformats.org/presentationml/2006/main" xmlns:r="http://schemas.openxmlformats.org/officeDocument/2006/relationships">
   <p:cSld>
     <p:spTree>
@@ -3288,7 +3292,7 @@
                 </a:solidFill>
                 <a:latin typeface="Calibri"/>
               </a:rPr>
-              <a:t>What We Built Today</a:t>
+              <a:t>Features  -  Repair Mode</a:t>
             </a:r>
           </a:p>
         </p:txBody>
@@ -3361,19 +3365,581 @@
           <a:p>
             <a:pPr algn="l">
               <a:spcAft>
-                <a:spcPts val="810"/>
+                <a:spcPts val="504"/>
               </a:spcAft>
             </a:pPr>
             <a:r>
-              <a:rPr sz="2000">
+              <a:rPr sz="1800">
                 <a:solidFill>
                   <a:srgbClr val="202020"/>
                 </a:solidFill>
                 <a:latin typeface="Calibri"/>
               </a:rPr>
-              <a:t>•  A web app that helps analysts repair fatal payment messages using AI</a:t>
-            </a:r>
-          </a:p>
+              <a:t>•  Paste any payment message  -  PACS, CAMT, MT, etc.</a:t>
+            </a:r>
+          </a:p>
+          <a:p>
+            <a:pPr algn="l">
+              <a:spcAft>
+                <a:spcPts val="504"/>
+              </a:spcAft>
+            </a:pPr>
+            <a:r>
+              <a:rPr sz="1800">
+                <a:solidFill>
+                  <a:srgbClr val="202020"/>
+                </a:solidFill>
+                <a:latin typeface="Calibri"/>
+              </a:rPr>
+              <a:t>•  Normalize step  -  AI cleans up formatting first so the diff is honest</a:t>
+            </a:r>
+          </a:p>
+          <a:p>
+            <a:pPr algn="l">
+              <a:spcAft>
+                <a:spcPts val="504"/>
+              </a:spcAft>
+            </a:pPr>
+            <a:r>
+              <a:rPr sz="1800">
+                <a:solidFill>
+                  <a:srgbClr val="202020"/>
+                </a:solidFill>
+                <a:latin typeface="Calibri"/>
+              </a:rPr>
+              <a:t>•  Repair step  -  AI returns the corrected payment message</a:t>
+            </a:r>
+          </a:p>
+          <a:p>
+            <a:pPr algn="l">
+              <a:spcAft>
+                <a:spcPts val="504"/>
+              </a:spcAft>
+            </a:pPr>
+            <a:r>
+              <a:rPr sz="1800">
+                <a:solidFill>
+                  <a:srgbClr val="202020"/>
+                </a:solidFill>
+                <a:latin typeface="Calibri"/>
+              </a:rPr>
+              <a:t>•  GitHub-style red/green diff so changes are obvious</a:t>
+            </a:r>
+          </a:p>
+          <a:p>
+            <a:pPr algn="l">
+              <a:spcAft>
+                <a:spcPts val="504"/>
+              </a:spcAft>
+            </a:pPr>
+            <a:r>
+              <a:rPr sz="1800">
+                <a:solidFill>
+                  <a:srgbClr val="202020"/>
+                </a:solidFill>
+                <a:latin typeface="Calibri"/>
+              </a:rPr>
+              <a:t>•  Copy button  -  one click to grab the repaired message</a:t>
+            </a:r>
+          </a:p>
+          <a:p>
+            <a:pPr algn="l">
+              <a:spcAft>
+                <a:spcPts val="504"/>
+              </a:spcAft>
+            </a:pPr>
+            <a:r>
+              <a:rPr sz="1800">
+                <a:solidFill>
+                  <a:srgbClr val="202020"/>
+                </a:solidFill>
+                <a:latin typeface="Calibri"/>
+              </a:rPr>
+              <a:t>•  "Explain it to me" button  -  AI explains every change in plain English</a:t>
+            </a:r>
+          </a:p>
+          <a:p>
+            <a:pPr algn="l">
+              <a:spcAft>
+                <a:spcPts val="504"/>
+              </a:spcAft>
+            </a:pPr>
+            <a:r>
+              <a:rPr sz="1800">
+                <a:solidFill>
+                  <a:srgbClr val="202020"/>
+                </a:solidFill>
+                <a:latin typeface="Calibri"/>
+              </a:rPr>
+              <a:t>•  "Four Eye Check" button  -  independent AI review with a confidence score</a:t>
+            </a:r>
+          </a:p>
+          <a:p>
+            <a:pPr algn="l" lvl="1">
+              <a:spcAft>
+                <a:spcPts val="504"/>
+              </a:spcAft>
+            </a:pPr>
+            <a:r>
+              <a:rPr sz="1500">
+                <a:solidFill>
+                  <a:srgbClr val="555555"/>
+                </a:solidFill>
+                <a:latin typeface="Calibri"/>
+              </a:rPr>
+              <a:t>  -  Green badge &gt;= 80%, amber 50-79%, red below 50%</a:t>
+            </a:r>
+          </a:p>
+          <a:p>
+            <a:pPr algn="l" lvl="1">
+              <a:spcAft>
+                <a:spcPts val="504"/>
+              </a:spcAft>
+            </a:pPr>
+            <a:r>
+              <a:rPr sz="1500">
+                <a:solidFill>
+                  <a:srgbClr val="555555"/>
+                </a:solidFill>
+                <a:latin typeface="Calibri"/>
+              </a:rPr>
+              <a:t>  -  Also lists any additional changes still needed</a:t>
+            </a:r>
+          </a:p>
+        </p:txBody>
+      </p:sp>
+      <p:sp>
+        <p:nvSpPr>
+          <p:cNvPr id="5" name="TextBox 4"/>
+          <p:cNvSpPr txBox="1"/>
+          <p:nvPr/>
+        </p:nvSpPr>
+        <p:spPr>
+          <a:xfrm>
+            <a:off x="11155680" y="6446520"/>
+            <a:ext cx="914400" cy="274320"/>
+          </a:xfrm>
+          <a:prstGeom prst="rect">
+            <a:avLst/>
+          </a:prstGeom>
+          <a:noFill/>
+        </p:spPr>
+        <p:txBody>
+          <a:bodyPr wrap="none">
+            <a:spAutoFit/>
+          </a:bodyPr>
+          <a:lstStyle/>
+          <a:p>
+            <a:pPr algn="r"/>
+            <a:r>
+              <a:rPr sz="1000">
+                <a:solidFill>
+                  <a:srgbClr val="555555"/>
+                </a:solidFill>
+              </a:rPr>
+              <a:t>10 / 12</a:t>
+            </a:r>
+          </a:p>
+        </p:txBody>
+      </p:sp>
+    </p:spTree>
+  </p:cSld>
+  <p:clrMapOvr>
+    <a:masterClrMapping/>
+  </p:clrMapOvr>
+</p:sld>
+</file>
+
+<file path=ppt/slides/slide11.xml><?xml version="1.0" encoding="utf-8"?>
+<p:sld xmlns:a="http://schemas.openxmlformats.org/drawingml/2006/main" xmlns:p="http://schemas.openxmlformats.org/presentationml/2006/main" xmlns:r="http://schemas.openxmlformats.org/officeDocument/2006/relationships">
+  <p:cSld>
+    <p:spTree>
+      <p:nvGrpSpPr>
+        <p:cNvPr id="1" name=""/>
+        <p:cNvGrpSpPr/>
+        <p:nvPr/>
+      </p:nvGrpSpPr>
+      <p:grpSpPr/>
+      <p:sp>
+        <p:nvSpPr>
+          <p:cNvPr id="2" name="TextBox 1"/>
+          <p:cNvSpPr txBox="1"/>
+          <p:nvPr/>
+        </p:nvSpPr>
+        <p:spPr>
+          <a:xfrm>
+            <a:off x="548640" y="365760"/>
+            <a:ext cx="11064240" cy="822960"/>
+          </a:xfrm>
+          <a:prstGeom prst="rect">
+            <a:avLst/>
+          </a:prstGeom>
+          <a:noFill/>
+        </p:spPr>
+        <p:txBody>
+          <a:bodyPr wrap="square">
+            <a:spAutoFit/>
+          </a:bodyPr>
+          <a:lstStyle/>
+          <a:p>
+            <a:r>
+              <a:rPr sz="3600" b="1">
+                <a:solidFill>
+                  <a:srgbClr val="1E2978"/>
+                </a:solidFill>
+                <a:latin typeface="Calibri"/>
+              </a:rPr>
+              <a:t>Features  -  Chat Mode + Controls</a:t>
+            </a:r>
+          </a:p>
+        </p:txBody>
+      </p:sp>
+      <p:sp>
+        <p:nvSpPr>
+          <p:cNvPr id="3" name="Rectangle 2"/>
+          <p:cNvSpPr/>
+          <p:nvPr/>
+        </p:nvSpPr>
+        <p:spPr>
+          <a:xfrm>
+            <a:off x="548640" y="1234440"/>
+            <a:ext cx="2286000" cy="38100"/>
+          </a:xfrm>
+          <a:prstGeom prst="rect">
+            <a:avLst/>
+          </a:prstGeom>
+          <a:solidFill>
+            <a:srgbClr val="1E2978"/>
+          </a:solidFill>
+          <a:ln>
+            <a:noFill/>
+          </a:ln>
+          <a:effectLst/>
+        </p:spPr>
+        <p:style>
+          <a:lnRef idx="1">
+            <a:schemeClr val="accent1"/>
+          </a:lnRef>
+          <a:fillRef idx="3">
+            <a:schemeClr val="accent1"/>
+          </a:fillRef>
+          <a:effectRef idx="2">
+            <a:schemeClr val="accent1"/>
+          </a:effectRef>
+          <a:fontRef idx="minor">
+            <a:schemeClr val="lt1"/>
+          </a:fontRef>
+        </p:style>
+        <p:txBody>
+          <a:bodyPr rtlCol="0" anchor="ctr"/>
+          <a:lstStyle/>
+          <a:p>
+            <a:pPr algn="ctr"/>
+          </a:p>
+        </p:txBody>
+      </p:sp>
+      <p:sp>
+        <p:nvSpPr>
+          <p:cNvPr id="4" name="TextBox 3"/>
+          <p:cNvSpPr txBox="1"/>
+          <p:nvPr/>
+        </p:nvSpPr>
+        <p:spPr>
+          <a:xfrm>
+            <a:off x="731520" y="1645920"/>
+            <a:ext cx="10789920" cy="4754880"/>
+          </a:xfrm>
+          <a:prstGeom prst="rect">
+            <a:avLst/>
+          </a:prstGeom>
+          <a:noFill/>
+        </p:spPr>
+        <p:txBody>
+          <a:bodyPr wrap="square">
+            <a:spAutoFit/>
+          </a:bodyPr>
+          <a:lstStyle/>
+          <a:p>
+            <a:pPr algn="l">
+              <a:spcAft>
+                <a:spcPts val="540"/>
+              </a:spcAft>
+            </a:pPr>
+            <a:r>
+              <a:rPr sz="1800">
+                <a:solidFill>
+                  <a:srgbClr val="202020"/>
+                </a:solidFill>
+                <a:latin typeface="Calibri"/>
+              </a:rPr>
+              <a:t>•  Chat Mode for back-and-forth conversation about a payment</a:t>
+            </a:r>
+          </a:p>
+          <a:p>
+            <a:pPr algn="l" lvl="1">
+              <a:spcAft>
+                <a:spcPts val="540"/>
+              </a:spcAft>
+            </a:pPr>
+            <a:r>
+              <a:rPr sz="1500">
+                <a:solidFill>
+                  <a:srgbClr val="555555"/>
+                </a:solidFill>
+                <a:latin typeface="Calibri"/>
+              </a:rPr>
+              <a:t>  -  Up to 50 follow-up messages with full context preserved</a:t>
+            </a:r>
+          </a:p>
+          <a:p>
+            <a:pPr algn="l">
+              <a:spcAft>
+                <a:spcPts val="540"/>
+              </a:spcAft>
+            </a:pPr>
+            <a:r>
+              <a:rPr sz="1800">
+                <a:solidFill>
+                  <a:srgbClr val="202020"/>
+                </a:solidFill>
+                <a:latin typeface="Calibri"/>
+              </a:rPr>
+              <a:t>•  Editable Payment Formats  -  PACS.008, PACS.004, CAMT.053, MT103, etc.</a:t>
+            </a:r>
+          </a:p>
+          <a:p>
+            <a:pPr algn="l">
+              <a:spcAft>
+                <a:spcPts val="540"/>
+              </a:spcAft>
+            </a:pPr>
+            <a:r>
+              <a:rPr sz="1800">
+                <a:solidFill>
+                  <a:srgbClr val="202020"/>
+                </a:solidFill>
+                <a:latin typeface="Calibri"/>
+              </a:rPr>
+              <a:t>•  Editable System Instructions per format  -  ops can tune prompts without code</a:t>
+            </a:r>
+          </a:p>
+          <a:p>
+            <a:pPr algn="l">
+              <a:spcAft>
+                <a:spcPts val="540"/>
+              </a:spcAft>
+            </a:pPr>
+            <a:r>
+              <a:rPr sz="1800">
+                <a:solidFill>
+                  <a:srgbClr val="202020"/>
+                </a:solidFill>
+                <a:latin typeface="Calibri"/>
+              </a:rPr>
+              <a:t>•  Editable Repair Prompt Template  -  shared across all formats</a:t>
+            </a:r>
+          </a:p>
+          <a:p>
+            <a:pPr algn="l">
+              <a:spcAft>
+                <a:spcPts val="540"/>
+              </a:spcAft>
+            </a:pPr>
+            <a:r>
+              <a:rPr sz="1800">
+                <a:solidFill>
+                  <a:srgbClr val="202020"/>
+                </a:solidFill>
+                <a:latin typeface="Calibri"/>
+              </a:rPr>
+              <a:t>•  Temperature slider  -  synced between Chat and Repair modes</a:t>
+            </a:r>
+          </a:p>
+          <a:p>
+            <a:pPr algn="l">
+              <a:spcAft>
+                <a:spcPts val="540"/>
+              </a:spcAft>
+            </a:pPr>
+            <a:r>
+              <a:rPr sz="1800">
+                <a:solidFill>
+                  <a:srgbClr val="202020"/>
+                </a:solidFill>
+                <a:latin typeface="Calibri"/>
+              </a:rPr>
+              <a:t>•  Settings panel  -  endpoint URL + bearer token saved in localStorage</a:t>
+            </a:r>
+          </a:p>
+          <a:p>
+            <a:pPr algn="l">
+              <a:spcAft>
+                <a:spcPts val="540"/>
+              </a:spcAft>
+            </a:pPr>
+            <a:r>
+              <a:rPr sz="1800">
+                <a:solidFill>
+                  <a:srgbClr val="202020"/>
+                </a:solidFill>
+                <a:latin typeface="Calibri"/>
+              </a:rPr>
+              <a:t>•  Nothing leaves the browser except calls to Vertex AI</a:t>
+            </a:r>
+          </a:p>
+        </p:txBody>
+      </p:sp>
+      <p:sp>
+        <p:nvSpPr>
+          <p:cNvPr id="5" name="TextBox 4"/>
+          <p:cNvSpPr txBox="1"/>
+          <p:nvPr/>
+        </p:nvSpPr>
+        <p:spPr>
+          <a:xfrm>
+            <a:off x="11155680" y="6446520"/>
+            <a:ext cx="914400" cy="274320"/>
+          </a:xfrm>
+          <a:prstGeom prst="rect">
+            <a:avLst/>
+          </a:prstGeom>
+          <a:noFill/>
+        </p:spPr>
+        <p:txBody>
+          <a:bodyPr wrap="none">
+            <a:spAutoFit/>
+          </a:bodyPr>
+          <a:lstStyle/>
+          <a:p>
+            <a:pPr algn="r"/>
+            <a:r>
+              <a:rPr sz="1000">
+                <a:solidFill>
+                  <a:srgbClr val="555555"/>
+                </a:solidFill>
+              </a:rPr>
+              <a:t>11 / 12</a:t>
+            </a:r>
+          </a:p>
+        </p:txBody>
+      </p:sp>
+    </p:spTree>
+  </p:cSld>
+  <p:clrMapOvr>
+    <a:masterClrMapping/>
+  </p:clrMapOvr>
+</p:sld>
+</file>
+
+<file path=ppt/slides/slide12.xml><?xml version="1.0" encoding="utf-8"?>
+<p:sld xmlns:a="http://schemas.openxmlformats.org/drawingml/2006/main" xmlns:p="http://schemas.openxmlformats.org/presentationml/2006/main" xmlns:r="http://schemas.openxmlformats.org/officeDocument/2006/relationships">
+  <p:cSld>
+    <p:spTree>
+      <p:nvGrpSpPr>
+        <p:cNvPr id="1" name=""/>
+        <p:cNvGrpSpPr/>
+        <p:nvPr/>
+      </p:nvGrpSpPr>
+      <p:grpSpPr/>
+      <p:sp>
+        <p:nvSpPr>
+          <p:cNvPr id="2" name="TextBox 1"/>
+          <p:cNvSpPr txBox="1"/>
+          <p:nvPr/>
+        </p:nvSpPr>
+        <p:spPr>
+          <a:xfrm>
+            <a:off x="548640" y="365760"/>
+            <a:ext cx="11064240" cy="822960"/>
+          </a:xfrm>
+          <a:prstGeom prst="rect">
+            <a:avLst/>
+          </a:prstGeom>
+          <a:noFill/>
+        </p:spPr>
+        <p:txBody>
+          <a:bodyPr wrap="square">
+            <a:spAutoFit/>
+          </a:bodyPr>
+          <a:lstStyle/>
+          <a:p>
+            <a:r>
+              <a:rPr sz="3600" b="1">
+                <a:solidFill>
+                  <a:srgbClr val="1E2978"/>
+                </a:solidFill>
+                <a:latin typeface="Calibri"/>
+              </a:rPr>
+              <a:t>Summary</a:t>
+            </a:r>
+          </a:p>
+        </p:txBody>
+      </p:sp>
+      <p:sp>
+        <p:nvSpPr>
+          <p:cNvPr id="3" name="Rectangle 2"/>
+          <p:cNvSpPr/>
+          <p:nvPr/>
+        </p:nvSpPr>
+        <p:spPr>
+          <a:xfrm>
+            <a:off x="548640" y="1234440"/>
+            <a:ext cx="2286000" cy="38100"/>
+          </a:xfrm>
+          <a:prstGeom prst="rect">
+            <a:avLst/>
+          </a:prstGeom>
+          <a:solidFill>
+            <a:srgbClr val="1E2978"/>
+          </a:solidFill>
+          <a:ln>
+            <a:noFill/>
+          </a:ln>
+          <a:effectLst/>
+        </p:spPr>
+        <p:style>
+          <a:lnRef idx="1">
+            <a:schemeClr val="accent1"/>
+          </a:lnRef>
+          <a:fillRef idx="3">
+            <a:schemeClr val="accent1"/>
+          </a:fillRef>
+          <a:effectRef idx="2">
+            <a:schemeClr val="accent1"/>
+          </a:effectRef>
+          <a:fontRef idx="minor">
+            <a:schemeClr val="lt1"/>
+          </a:fontRef>
+        </p:style>
+        <p:txBody>
+          <a:bodyPr rtlCol="0" anchor="ctr"/>
+          <a:lstStyle/>
+          <a:p>
+            <a:pPr algn="ctr"/>
+          </a:p>
+        </p:txBody>
+      </p:sp>
+      <p:sp>
+        <p:nvSpPr>
+          <p:cNvPr id="4" name="TextBox 3"/>
+          <p:cNvSpPr txBox="1"/>
+          <p:nvPr/>
+        </p:nvSpPr>
+        <p:spPr>
+          <a:xfrm>
+            <a:off x="731520" y="1645920"/>
+            <a:ext cx="10789920" cy="4754880"/>
+          </a:xfrm>
+          <a:prstGeom prst="rect">
+            <a:avLst/>
+          </a:prstGeom>
+          <a:noFill/>
+        </p:spPr>
+        <p:txBody>
+          <a:bodyPr wrap="square">
+            <a:spAutoFit/>
+          </a:bodyPr>
+          <a:lstStyle/>
           <a:p>
             <a:pPr algn="l">
               <a:spcAft>
@@ -3387,39 +3953,7 @@
                 </a:solidFill>
                 <a:latin typeface="Calibri"/>
               </a:rPr>
-              <a:t>•  Two modes inside one tool:</a:t>
-            </a:r>
-          </a:p>
-          <a:p>
-            <a:pPr algn="l" lvl="1">
-              <a:spcAft>
-                <a:spcPts val="810"/>
-              </a:spcAft>
-            </a:pPr>
-            <a:r>
-              <a:rPr sz="1700">
-                <a:solidFill>
-                  <a:srgbClr val="555555"/>
-                </a:solidFill>
-                <a:latin typeface="Calibri"/>
-              </a:rPr>
-              <a:t>  -  Chat Mode  -  ask the AI questions about a payment message</a:t>
-            </a:r>
-          </a:p>
-          <a:p>
-            <a:pPr algn="l" lvl="1">
-              <a:spcAft>
-                <a:spcPts val="810"/>
-              </a:spcAft>
-            </a:pPr>
-            <a:r>
-              <a:rPr sz="1700">
-                <a:solidFill>
-                  <a:srgbClr val="555555"/>
-                </a:solidFill>
-                <a:latin typeface="Calibri"/>
-              </a:rPr>
-              <a:t>  -  Repair Mode  -  auto-correct a broken payment and show the diff</a:t>
+              <a:t>•  We built a working proof-of-concept payment repair assistant</a:t>
             </a:r>
           </a:p>
           <a:p>
@@ -3435,7 +3969,7 @@
                 </a:solidFill>
                 <a:latin typeface="Calibri"/>
               </a:rPr>
-              <a:t>•  Built as a simple static website (HTML, CSS, JavaScript)</a:t>
+              <a:t>•  Thin, transparent layer on top of Deutsche Bank's hosted Gemini AI</a:t>
             </a:r>
           </a:p>
           <a:p>
@@ -3451,7 +3985,7 @@
                 </a:solidFill>
                 <a:latin typeface="Calibri"/>
               </a:rPr>
-              <a:t>•  Runs entirely in the browser, calls Deutsche Bank's internal Vertex AI endpoint</a:t>
+              <a:t>•  Operators get instant AI suggestions, a verifiable diff, and a four-eye check</a:t>
             </a:r>
           </a:p>
           <a:p>
@@ -3467,7 +4001,39 @@
                 </a:solidFill>
                 <a:latin typeface="Calibri"/>
               </a:rPr>
-              <a:t>•  Easy to deploy  -  just static files behind nginx on OpenShift</a:t>
+              <a:t>•  All controls (prompts, temperature, formats) editable by ops  -  no code release</a:t>
+            </a:r>
+          </a:p>
+          <a:p>
+            <a:pPr algn="l">
+              <a:spcAft>
+                <a:spcPts val="810"/>
+              </a:spcAft>
+            </a:pPr>
+            <a:r>
+              <a:rPr sz="2000">
+                <a:solidFill>
+                  <a:srgbClr val="202020"/>
+                </a:solidFill>
+                <a:latin typeface="Calibri"/>
+              </a:rPr>
+              <a:t>•  Easy to deploy: static site, no backend, no new infrastructure</a:t>
+            </a:r>
+          </a:p>
+          <a:p>
+            <a:pPr algn="l">
+              <a:spcAft>
+                <a:spcPts val="810"/>
+              </a:spcAft>
+            </a:pPr>
+            <a:r>
+              <a:rPr sz="2000">
+                <a:solidFill>
+                  <a:srgbClr val="202020"/>
+                </a:solidFill>
+                <a:latin typeface="Calibri"/>
+              </a:rPr>
+              <a:t>•  Next step: pilot with HVP operators on real (shadow) repair queues</a:t>
             </a:r>
           </a:p>
         </p:txBody>
@@ -3501,7 +4067,320 @@
                   <a:srgbClr val="555555"/>
                 </a:solidFill>
               </a:rPr>
-              <a:t>2 / 8</a:t>
+              <a:t>12 / 12</a:t>
+            </a:r>
+          </a:p>
+        </p:txBody>
+      </p:sp>
+    </p:spTree>
+  </p:cSld>
+  <p:clrMapOvr>
+    <a:masterClrMapping/>
+  </p:clrMapOvr>
+</p:sld>
+</file>
+
+<file path=ppt/slides/slide2.xml><?xml version="1.0" encoding="utf-8"?>
+<p:sld xmlns:a="http://schemas.openxmlformats.org/drawingml/2006/main" xmlns:p="http://schemas.openxmlformats.org/presentationml/2006/main" xmlns:r="http://schemas.openxmlformats.org/officeDocument/2006/relationships">
+  <p:cSld>
+    <p:spTree>
+      <p:nvGrpSpPr>
+        <p:cNvPr id="1" name=""/>
+        <p:cNvGrpSpPr/>
+        <p:nvPr/>
+      </p:nvGrpSpPr>
+      <p:grpSpPr/>
+      <p:sp>
+        <p:nvSpPr>
+          <p:cNvPr id="2" name="TextBox 1"/>
+          <p:cNvSpPr txBox="1"/>
+          <p:nvPr/>
+        </p:nvSpPr>
+        <p:spPr>
+          <a:xfrm>
+            <a:off x="548640" y="365760"/>
+            <a:ext cx="11064240" cy="822960"/>
+          </a:xfrm>
+          <a:prstGeom prst="rect">
+            <a:avLst/>
+          </a:prstGeom>
+          <a:noFill/>
+        </p:spPr>
+        <p:txBody>
+          <a:bodyPr wrap="square">
+            <a:spAutoFit/>
+          </a:bodyPr>
+          <a:lstStyle/>
+          <a:p>
+            <a:r>
+              <a:rPr sz="3600" b="1">
+                <a:solidFill>
+                  <a:srgbClr val="1E2978"/>
+                </a:solidFill>
+                <a:latin typeface="Calibri"/>
+              </a:rPr>
+              <a:t>What We Built Today</a:t>
+            </a:r>
+          </a:p>
+        </p:txBody>
+      </p:sp>
+      <p:sp>
+        <p:nvSpPr>
+          <p:cNvPr id="3" name="Rectangle 2"/>
+          <p:cNvSpPr/>
+          <p:nvPr/>
+        </p:nvSpPr>
+        <p:spPr>
+          <a:xfrm>
+            <a:off x="548640" y="1234440"/>
+            <a:ext cx="2286000" cy="38100"/>
+          </a:xfrm>
+          <a:prstGeom prst="rect">
+            <a:avLst/>
+          </a:prstGeom>
+          <a:solidFill>
+            <a:srgbClr val="1E2978"/>
+          </a:solidFill>
+          <a:ln>
+            <a:noFill/>
+          </a:ln>
+          <a:effectLst/>
+        </p:spPr>
+        <p:style>
+          <a:lnRef idx="1">
+            <a:schemeClr val="accent1"/>
+          </a:lnRef>
+          <a:fillRef idx="3">
+            <a:schemeClr val="accent1"/>
+          </a:fillRef>
+          <a:effectRef idx="2">
+            <a:schemeClr val="accent1"/>
+          </a:effectRef>
+          <a:fontRef idx="minor">
+            <a:schemeClr val="lt1"/>
+          </a:fontRef>
+        </p:style>
+        <p:txBody>
+          <a:bodyPr rtlCol="0" anchor="ctr"/>
+          <a:lstStyle/>
+          <a:p>
+            <a:pPr algn="ctr"/>
+          </a:p>
+        </p:txBody>
+      </p:sp>
+      <p:sp>
+        <p:nvSpPr>
+          <p:cNvPr id="4" name="TextBox 3"/>
+          <p:cNvSpPr txBox="1"/>
+          <p:nvPr/>
+        </p:nvSpPr>
+        <p:spPr>
+          <a:xfrm>
+            <a:off x="548640" y="1645920"/>
+            <a:ext cx="5303520" cy="4754880"/>
+          </a:xfrm>
+          <a:prstGeom prst="rect">
+            <a:avLst/>
+          </a:prstGeom>
+          <a:noFill/>
+        </p:spPr>
+        <p:txBody>
+          <a:bodyPr wrap="square">
+            <a:spAutoFit/>
+          </a:bodyPr>
+          <a:lstStyle/>
+          <a:p>
+            <a:pPr algn="l">
+              <a:spcAft>
+                <a:spcPts val="540"/>
+              </a:spcAft>
+            </a:pPr>
+            <a:r>
+              <a:rPr sz="1600">
+                <a:solidFill>
+                  <a:srgbClr val="202020"/>
+                </a:solidFill>
+                <a:latin typeface="Calibri"/>
+              </a:rPr>
+              <a:t>•  A web app that helps analysts repair fatal payment messages using AI</a:t>
+            </a:r>
+          </a:p>
+          <a:p>
+            <a:pPr algn="l">
+              <a:spcAft>
+                <a:spcPts val="540"/>
+              </a:spcAft>
+            </a:pPr>
+            <a:r>
+              <a:rPr sz="1600">
+                <a:solidFill>
+                  <a:srgbClr val="202020"/>
+                </a:solidFill>
+                <a:latin typeface="Calibri"/>
+              </a:rPr>
+              <a:t>•  Two modes inside one tool:</a:t>
+            </a:r>
+          </a:p>
+          <a:p>
+            <a:pPr algn="l" lvl="1">
+              <a:spcAft>
+                <a:spcPts val="540"/>
+              </a:spcAft>
+            </a:pPr>
+            <a:r>
+              <a:rPr sz="1300">
+                <a:solidFill>
+                  <a:srgbClr val="555555"/>
+                </a:solidFill>
+                <a:latin typeface="Calibri"/>
+              </a:rPr>
+              <a:t>  -  Chat Mode  -  ask the AI about a payment message</a:t>
+            </a:r>
+          </a:p>
+          <a:p>
+            <a:pPr algn="l" lvl="1">
+              <a:spcAft>
+                <a:spcPts val="540"/>
+              </a:spcAft>
+            </a:pPr>
+            <a:r>
+              <a:rPr sz="1300">
+                <a:solidFill>
+                  <a:srgbClr val="555555"/>
+                </a:solidFill>
+                <a:latin typeface="Calibri"/>
+              </a:rPr>
+              <a:t>  -  Repair Mode  -  auto-correct and show the diff</a:t>
+            </a:r>
+          </a:p>
+          <a:p>
+            <a:pPr algn="l">
+              <a:spcAft>
+                <a:spcPts val="540"/>
+              </a:spcAft>
+            </a:pPr>
+            <a:r>
+              <a:rPr sz="1600">
+                <a:solidFill>
+                  <a:srgbClr val="202020"/>
+                </a:solidFill>
+                <a:latin typeface="Calibri"/>
+              </a:rPr>
+              <a:t>•  Built as a static website (HTML, CSS, JavaScript)</a:t>
+            </a:r>
+          </a:p>
+          <a:p>
+            <a:pPr algn="l">
+              <a:spcAft>
+                <a:spcPts val="540"/>
+              </a:spcAft>
+            </a:pPr>
+            <a:r>
+              <a:rPr sz="1600">
+                <a:solidFill>
+                  <a:srgbClr val="202020"/>
+                </a:solidFill>
+                <a:latin typeface="Calibri"/>
+              </a:rPr>
+              <a:t>•  Runs in the browser, calls Deutsche Bank's Vertex AI endpoint</a:t>
+            </a:r>
+          </a:p>
+        </p:txBody>
+      </p:sp>
+      <p:pic>
+        <p:nvPicPr>
+          <p:cNvPr id="5" name="Picture 4" descr="01_home_chat.png"/>
+          <p:cNvPicPr>
+            <a:picLocks noChangeAspect="1"/>
+          </p:cNvPicPr>
+          <p:nvPr/>
+        </p:nvPicPr>
+        <p:blipFill>
+          <a:blip r:embed="rId2"/>
+          <a:stretch>
+            <a:fillRect/>
+          </a:stretch>
+        </p:blipFill>
+        <p:spPr>
+          <a:xfrm>
+            <a:off x="6126480" y="1988820"/>
+            <a:ext cx="5760720" cy="3703320"/>
+          </a:xfrm>
+          <a:prstGeom prst="rect">
+            <a:avLst/>
+          </a:prstGeom>
+          <a:ln w="9525">
+            <a:solidFill>
+              <a:srgbClr val="CCCCCC"/>
+            </a:solidFill>
+          </a:ln>
+        </p:spPr>
+      </p:pic>
+      <p:sp>
+        <p:nvSpPr>
+          <p:cNvPr id="6" name="TextBox 5"/>
+          <p:cNvSpPr txBox="1"/>
+          <p:nvPr/>
+        </p:nvSpPr>
+        <p:spPr>
+          <a:xfrm>
+            <a:off x="6126480" y="6172200"/>
+            <a:ext cx="5760720" cy="365760"/>
+          </a:xfrm>
+          <a:prstGeom prst="rect">
+            <a:avLst/>
+          </a:prstGeom>
+          <a:noFill/>
+        </p:spPr>
+        <p:txBody>
+          <a:bodyPr wrap="none">
+            <a:spAutoFit/>
+          </a:bodyPr>
+          <a:lstStyle/>
+          <a:p>
+            <a:pPr algn="ctr"/>
+            <a:r>
+              <a:rPr sz="1200" i="1">
+                <a:solidFill>
+                  <a:srgbClr val="555555"/>
+                </a:solidFill>
+                <a:latin typeface="Calibri"/>
+              </a:rPr>
+              <a:t>Home view  -  Chat Mode tab selected</a:t>
+            </a:r>
+          </a:p>
+        </p:txBody>
+      </p:sp>
+      <p:sp>
+        <p:nvSpPr>
+          <p:cNvPr id="7" name="TextBox 6"/>
+          <p:cNvSpPr txBox="1"/>
+          <p:nvPr/>
+        </p:nvSpPr>
+        <p:spPr>
+          <a:xfrm>
+            <a:off x="11155680" y="6446520"/>
+            <a:ext cx="914400" cy="274320"/>
+          </a:xfrm>
+          <a:prstGeom prst="rect">
+            <a:avLst/>
+          </a:prstGeom>
+          <a:noFill/>
+        </p:spPr>
+        <p:txBody>
+          <a:bodyPr wrap="none">
+            <a:spAutoFit/>
+          </a:bodyPr>
+          <a:lstStyle/>
+          <a:p>
+            <a:pPr algn="r"/>
+            <a:r>
+              <a:rPr sz="1000">
+                <a:solidFill>
+                  <a:srgbClr val="555555"/>
+                </a:solidFill>
+              </a:rPr>
+              <a:t>2 / 12</a:t>
             </a:r>
           </a:p>
         </p:txBody>
@@ -3700,7 +4579,7 @@
                 </a:solidFill>
                 <a:latin typeface="Calibri"/>
               </a:rPr>
-              <a:t>  -  temperature  -  how creative vs. deterministic the AI should be (0 = strict, 1 = creative)</a:t>
+              <a:t>  -  temperature  -  how creative vs. deterministic (0 = strict, 1 = creative)</a:t>
             </a:r>
           </a:p>
           <a:p>
@@ -3782,7 +4661,7 @@
                   <a:srgbClr val="555555"/>
                 </a:solidFill>
               </a:rPr>
-              <a:t>3 / 8</a:t>
+              <a:t>3 / 12</a:t>
             </a:r>
           </a:p>
         </p:txBody>
@@ -3907,11 +4786,11 @@
           <a:p>
             <a:pPr algn="l">
               <a:spcAft>
-                <a:spcPts val="810"/>
+                <a:spcPts val="540"/>
               </a:spcAft>
             </a:pPr>
             <a:r>
-              <a:rPr sz="2000">
+              <a:rPr sz="1800">
                 <a:solidFill>
                   <a:srgbClr val="202020"/>
                 </a:solidFill>
@@ -3923,11 +4802,11 @@
           <a:p>
             <a:pPr algn="l">
               <a:spcAft>
-                <a:spcPts val="810"/>
+                <a:spcPts val="540"/>
               </a:spcAft>
             </a:pPr>
             <a:r>
-              <a:rPr sz="2000">
+              <a:rPr sz="1800">
                 <a:solidFill>
                   <a:srgbClr val="202020"/>
                 </a:solidFill>
@@ -3939,27 +4818,27 @@
           <a:p>
             <a:pPr algn="l">
               <a:spcAft>
-                <a:spcPts val="810"/>
+                <a:spcPts val="540"/>
               </a:spcAft>
             </a:pPr>
             <a:r>
-              <a:rPr sz="2000">
+              <a:rPr sz="1800">
                 <a:solidFill>
                   <a:srgbClr val="202020"/>
                 </a:solidFill>
                 <a:latin typeface="Calibri"/>
               </a:rPr>
-              <a:t>•  Every action in the app sends the same JSON request shape:</a:t>
+              <a:t>•  Every action sends the same JSON request shape:</a:t>
             </a:r>
           </a:p>
           <a:p>
             <a:pPr algn="l" lvl="1">
               <a:spcAft>
-                <a:spcPts val="810"/>
+                <a:spcPts val="540"/>
               </a:spcAft>
             </a:pPr>
             <a:r>
-              <a:rPr sz="1700">
+              <a:rPr sz="1500">
                 <a:solidFill>
                   <a:srgbClr val="555555"/>
                 </a:solidFill>
@@ -3971,11 +4850,11 @@
           <a:p>
             <a:pPr algn="l">
               <a:spcAft>
-                <a:spcPts val="810"/>
+                <a:spcPts val="540"/>
               </a:spcAft>
             </a:pPr>
             <a:r>
-              <a:rPr sz="2000">
+              <a:rPr sz="1800">
                 <a:solidFill>
                   <a:srgbClr val="202020"/>
                 </a:solidFill>
@@ -3987,11 +4866,11 @@
           <a:p>
             <a:pPr algn="l" lvl="1">
               <a:spcAft>
-                <a:spcPts val="810"/>
+                <a:spcPts val="540"/>
               </a:spcAft>
             </a:pPr>
             <a:r>
-              <a:rPr sz="1700">
+              <a:rPr sz="1500">
                 <a:solidFill>
                   <a:srgbClr val="555555"/>
                 </a:solidFill>
@@ -4003,49 +4882,49 @@
           <a:p>
             <a:pPr algn="l" lvl="1">
               <a:spcAft>
-                <a:spcPts val="810"/>
+                <a:spcPts val="540"/>
               </a:spcAft>
             </a:pPr>
             <a:r>
-              <a:rPr sz="1700">
+              <a:rPr sz="1500">
                 <a:solidFill>
                   <a:srgbClr val="555555"/>
                 </a:solidFill>
                 <a:latin typeface="Calibri"/>
               </a:rPr>
-              <a:t>  -  Repair Mode uses a strict repair-engine persona that only returns the corrected message</a:t>
+              <a:t>  -  Repair Mode uses a strict repair-engine persona</a:t>
             </a:r>
           </a:p>
           <a:p>
             <a:pPr algn="l">
               <a:spcAft>
-                <a:spcPts val="810"/>
+                <a:spcPts val="540"/>
               </a:spcAft>
             </a:pPr>
             <a:r>
-              <a:rPr sz="2000">
+              <a:rPr sz="1800">
                 <a:solidFill>
                   <a:srgbClr val="202020"/>
                 </a:solidFill>
                 <a:latin typeface="Calibri"/>
               </a:rPr>
-              <a:t>•  Temperature is set low (0.2) for repair work so output is predictable</a:t>
+              <a:t>•  Temperature set low (0.2) for repair so output is predictable</a:t>
             </a:r>
           </a:p>
           <a:p>
             <a:pPr algn="l">
               <a:spcAft>
-                <a:spcPts val="810"/>
+                <a:spcPts val="540"/>
               </a:spcAft>
             </a:pPr>
             <a:r>
-              <a:rPr sz="2000">
+              <a:rPr sz="1800">
                 <a:solidFill>
                   <a:srgbClr val="202020"/>
                 </a:solidFill>
                 <a:latin typeface="Calibri"/>
               </a:rPr>
-              <a:t>•  All processing stays within Deutsche Bank's hosted Gemini tenant  -  no external data calls</a:t>
+              <a:t>•  All processing stays inside Deutsche Bank's Gemini tenant</a:t>
             </a:r>
           </a:p>
         </p:txBody>
@@ -4079,7 +4958,7 @@
                   <a:srgbClr val="555555"/>
                 </a:solidFill>
               </a:rPr>
-              <a:t>4 / 8</a:t>
+              <a:t>4 / 12</a:t>
             </a:r>
           </a:p>
         </p:txBody>
@@ -4214,7 +5093,7 @@
                 </a:solidFill>
                 <a:latin typeface="Calibri"/>
               </a:rPr>
-              <a:t>•  Today, fatal payments are repaired manually  -  slow, error-prone, and SLA-critical</a:t>
+              <a:t>•  Today, fatal payments are repaired manually  -  slow and SLA-critical</a:t>
             </a:r>
           </a:p>
           <a:p>
@@ -4246,7 +5125,7 @@
                 </a:solidFill>
                 <a:latin typeface="Calibri"/>
               </a:rPr>
-              <a:t>  -  Suggests the fix instantly instead of hunting through XML by hand</a:t>
+              <a:t>  -  Suggests the fix instantly instead of hunting through XML</a:t>
             </a:r>
           </a:p>
           <a:p>
@@ -4262,7 +5141,7 @@
                 </a:solidFill>
                 <a:latin typeface="Calibri"/>
               </a:rPr>
-              <a:t>  -  Shows a clear before/after diff so the operator can verify what changed</a:t>
+              <a:t>  -  Shows a clear before/after diff so the operator can verify</a:t>
             </a:r>
           </a:p>
           <a:p>
@@ -4294,7 +5173,7 @@
                 </a:solidFill>
                 <a:latin typeface="Calibri"/>
               </a:rPr>
-              <a:t>•  Less time per repair = fewer SLA misses, lower FX exposure, less rework</a:t>
+              <a:t>•  Less time per repair = fewer SLA misses, less rework</a:t>
             </a:r>
           </a:p>
           <a:p>
@@ -4310,7 +5189,7 @@
                 </a:solidFill>
                 <a:latin typeface="Calibri"/>
               </a:rPr>
-              <a:t>•  Acts as a knowledge tool  -  junior analysts learn from the AI's reasoning</a:t>
+              <a:t>•  Acts as a knowledge tool  -  juniors learn from the AI's reasoning</a:t>
             </a:r>
           </a:p>
           <a:p>
@@ -4360,7 +5239,7 @@
                   <a:srgbClr val="555555"/>
                 </a:solidFill>
               </a:rPr>
-              <a:t>5 / 8</a:t>
+              <a:t>5 / 12</a:t>
             </a:r>
           </a:p>
         </p:txBody>
@@ -4412,7 +5291,7 @@
                 </a:solidFill>
                 <a:latin typeface="Calibri"/>
               </a:rPr>
-              <a:t>Features We Built  -  Repair Mode</a:t>
+              <a:t>Example  -  Loading a Broken Payment</a:t>
             </a:r>
           </a:p>
         </p:txBody>
@@ -4461,16 +5340,45 @@
           </a:p>
         </p:txBody>
       </p:sp>
-      <p:sp>
-        <p:nvSpPr>
-          <p:cNvPr id="4" name="TextBox 3"/>
+      <p:pic>
+        <p:nvPicPr>
+          <p:cNvPr id="4" name="Picture 3" descr="02_repair_mode.png"/>
+          <p:cNvPicPr>
+            <a:picLocks noChangeAspect="1"/>
+          </p:cNvPicPr>
+          <p:nvPr/>
+        </p:nvPicPr>
+        <p:blipFill>
+          <a:blip r:embed="rId2"/>
+          <a:stretch>
+            <a:fillRect/>
+          </a:stretch>
+        </p:blipFill>
+        <p:spPr>
+          <a:xfrm>
+            <a:off x="2524760" y="1554480"/>
+            <a:ext cx="7112000" cy="4572000"/>
+          </a:xfrm>
+          <a:prstGeom prst="rect">
+            <a:avLst/>
+          </a:prstGeom>
+          <a:ln w="9525">
+            <a:solidFill>
+              <a:srgbClr val="CCCCCC"/>
+            </a:solidFill>
+          </a:ln>
+        </p:spPr>
+      </p:pic>
+      <p:sp>
+        <p:nvSpPr>
+          <p:cNvPr id="5" name="TextBox 4"/>
           <p:cNvSpPr txBox="1"/>
           <p:nvPr/>
         </p:nvSpPr>
         <p:spPr>
           <a:xfrm>
-            <a:off x="731520" y="1645920"/>
-            <a:ext cx="10789920" cy="4754880"/>
+            <a:off x="548640" y="6172200"/>
+            <a:ext cx="11064240" cy="365760"/>
           </a:xfrm>
           <a:prstGeom prst="rect">
             <a:avLst/>
@@ -4478,159 +5386,27 @@
           <a:noFill/>
         </p:spPr>
         <p:txBody>
-          <a:bodyPr wrap="square">
+          <a:bodyPr wrap="none">
             <a:spAutoFit/>
           </a:bodyPr>
           <a:lstStyle/>
           <a:p>
-            <a:pPr algn="l">
-              <a:spcAft>
-                <a:spcPts val="540"/>
-              </a:spcAft>
-            </a:pPr>
-            <a:r>
-              <a:rPr sz="1800">
-                <a:solidFill>
-                  <a:srgbClr val="202020"/>
-                </a:solidFill>
-                <a:latin typeface="Calibri"/>
-              </a:rPr>
-              <a:t>•  Paste a broken payment message  -  works with PACS, CAMT, MT, etc.</a:t>
-            </a:r>
-          </a:p>
-          <a:p>
-            <a:pPr algn="l">
-              <a:spcAft>
-                <a:spcPts val="540"/>
-              </a:spcAft>
-            </a:pPr>
-            <a:r>
-              <a:rPr sz="1800">
-                <a:solidFill>
-                  <a:srgbClr val="202020"/>
-                </a:solidFill>
-                <a:latin typeface="Calibri"/>
-              </a:rPr>
-              <a:t>•  Normalize step  -  AI cleans up formatting first so the diff is honest</a:t>
-            </a:r>
-          </a:p>
-          <a:p>
-            <a:pPr algn="l">
-              <a:spcAft>
-                <a:spcPts val="540"/>
-              </a:spcAft>
-            </a:pPr>
-            <a:r>
-              <a:rPr sz="1800">
-                <a:solidFill>
-                  <a:srgbClr val="202020"/>
-                </a:solidFill>
-                <a:latin typeface="Calibri"/>
-              </a:rPr>
-              <a:t>•  Repair step  -  AI returns the corrected payment message</a:t>
-            </a:r>
-          </a:p>
-          <a:p>
-            <a:pPr algn="l">
-              <a:spcAft>
-                <a:spcPts val="540"/>
-              </a:spcAft>
-            </a:pPr>
-            <a:r>
-              <a:rPr sz="1800">
-                <a:solidFill>
-                  <a:srgbClr val="202020"/>
-                </a:solidFill>
-                <a:latin typeface="Calibri"/>
-              </a:rPr>
-              <a:t>•  GitHub-style red/green diff so changes are obvious at a glance</a:t>
-            </a:r>
-          </a:p>
-          <a:p>
-            <a:pPr algn="l">
-              <a:spcAft>
-                <a:spcPts val="540"/>
-              </a:spcAft>
-            </a:pPr>
-            <a:r>
-              <a:rPr sz="1800">
-                <a:solidFill>
-                  <a:srgbClr val="202020"/>
-                </a:solidFill>
-                <a:latin typeface="Calibri"/>
-              </a:rPr>
-              <a:t>•  Copy button  -  one click to grab the repaired message</a:t>
-            </a:r>
-          </a:p>
-          <a:p>
-            <a:pPr algn="l">
-              <a:spcAft>
-                <a:spcPts val="540"/>
-              </a:spcAft>
-            </a:pPr>
-            <a:r>
-              <a:rPr sz="1800">
-                <a:solidFill>
-                  <a:srgbClr val="202020"/>
-                </a:solidFill>
-                <a:latin typeface="Calibri"/>
-              </a:rPr>
-              <a:t>•  "Explain it to me" button  -  AI explains every change in plain English</a:t>
-            </a:r>
-          </a:p>
-          <a:p>
-            <a:pPr algn="l">
-              <a:spcAft>
-                <a:spcPts val="540"/>
-              </a:spcAft>
-            </a:pPr>
-            <a:r>
-              <a:rPr sz="1800">
-                <a:solidFill>
-                  <a:srgbClr val="202020"/>
-                </a:solidFill>
-                <a:latin typeface="Calibri"/>
-              </a:rPr>
-              <a:t>•  "Four Eye Check" button  -  runs the repair through the AI again as an independent reviewer</a:t>
-            </a:r>
-          </a:p>
-          <a:p>
-            <a:pPr algn="l" lvl="1">
-              <a:spcAft>
-                <a:spcPts val="540"/>
-              </a:spcAft>
-            </a:pPr>
-            <a:r>
-              <a:rPr sz="1500">
+            <a:pPr algn="ctr"/>
+            <a:r>
+              <a:rPr sz="1200" i="1">
                 <a:solidFill>
                   <a:srgbClr val="555555"/>
                 </a:solidFill>
                 <a:latin typeface="Calibri"/>
               </a:rPr>
-              <a:t>  -  Returns a confidence score (0-100%) with a green/amber/red badge</a:t>
-            </a:r>
-          </a:p>
-          <a:p>
-            <a:pPr algn="l" lvl="1">
-              <a:spcAft>
-                <a:spcPts val="540"/>
-              </a:spcAft>
-            </a:pPr>
-            <a:r>
-              <a:rPr sz="1500">
-                <a:solidFill>
-                  <a:srgbClr val="555555"/>
-                </a:solidFill>
-                <a:latin typeface="Calibri"/>
-              </a:rPr>
-              <a:t>  -  Lists any remaining issues if the first repair was incomplete</a:t>
-            </a:r>
-          </a:p>
-        </p:txBody>
-      </p:sp>
-      <p:sp>
-        <p:nvSpPr>
-          <p:cNvPr id="5" name="TextBox 4"/>
+              <a:t>Repair Mode  -  PACS.008 payment pasted in.  Note the invalid currency code Ccy="EU" in the XML.</a:t>
+            </a:r>
+          </a:p>
+        </p:txBody>
+      </p:sp>
+      <p:sp>
+        <p:nvSpPr>
+          <p:cNvPr id="6" name="TextBox 5"/>
           <p:cNvSpPr txBox="1"/>
           <p:nvPr/>
         </p:nvSpPr>
@@ -4657,7 +5433,7 @@
                   <a:srgbClr val="555555"/>
                 </a:solidFill>
               </a:rPr>
-              <a:t>6 / 8</a:t>
+              <a:t>6 / 12</a:t>
             </a:r>
           </a:p>
         </p:txBody>
@@ -4709,7 +5485,7 @@
                 </a:solidFill>
                 <a:latin typeface="Calibri"/>
               </a:rPr>
-              <a:t>Features We Built  -  Chat Mode + Controls</a:t>
+              <a:t>Example  -  AI Repair Result (Diff View)</a:t>
             </a:r>
           </a:p>
         </p:txBody>
@@ -4758,16 +5534,45 @@
           </a:p>
         </p:txBody>
       </p:sp>
-      <p:sp>
-        <p:nvSpPr>
-          <p:cNvPr id="4" name="TextBox 3"/>
+      <p:pic>
+        <p:nvPicPr>
+          <p:cNvPr id="4" name="Picture 3" descr="03_diff_result.png"/>
+          <p:cNvPicPr>
+            <a:picLocks noChangeAspect="1"/>
+          </p:cNvPicPr>
+          <p:nvPr/>
+        </p:nvPicPr>
+        <p:blipFill>
+          <a:blip r:embed="rId2"/>
+          <a:stretch>
+            <a:fillRect/>
+          </a:stretch>
+        </p:blipFill>
+        <p:spPr>
+          <a:xfrm>
+            <a:off x="2524760" y="1554480"/>
+            <a:ext cx="7112000" cy="4572000"/>
+          </a:xfrm>
+          <a:prstGeom prst="rect">
+            <a:avLst/>
+          </a:prstGeom>
+          <a:ln w="9525">
+            <a:solidFill>
+              <a:srgbClr val="CCCCCC"/>
+            </a:solidFill>
+          </a:ln>
+        </p:spPr>
+      </p:pic>
+      <p:sp>
+        <p:nvSpPr>
+          <p:cNvPr id="5" name="TextBox 4"/>
           <p:cNvSpPr txBox="1"/>
           <p:nvPr/>
         </p:nvSpPr>
         <p:spPr>
           <a:xfrm>
-            <a:off x="731520" y="1645920"/>
-            <a:ext cx="10789920" cy="4754880"/>
+            <a:off x="548640" y="6172200"/>
+            <a:ext cx="11064240" cy="365760"/>
           </a:xfrm>
           <a:prstGeom prst="rect">
             <a:avLst/>
@@ -4775,159 +5580,27 @@
           <a:noFill/>
         </p:spPr>
         <p:txBody>
-          <a:bodyPr wrap="square">
+          <a:bodyPr wrap="none">
             <a:spAutoFit/>
           </a:bodyPr>
           <a:lstStyle/>
           <a:p>
-            <a:pPr algn="l">
-              <a:spcAft>
-                <a:spcPts val="540"/>
-              </a:spcAft>
-            </a:pPr>
-            <a:r>
-              <a:rPr sz="1800">
-                <a:solidFill>
-                  <a:srgbClr val="202020"/>
-                </a:solidFill>
-                <a:latin typeface="Calibri"/>
-              </a:rPr>
-              <a:t>•  Chat Mode for back-and-forth conversation about a payment</a:t>
-            </a:r>
-          </a:p>
-          <a:p>
-            <a:pPr algn="l" lvl="1">
-              <a:spcAft>
-                <a:spcPts val="540"/>
-              </a:spcAft>
-            </a:pPr>
-            <a:r>
-              <a:rPr sz="1500">
+            <a:pPr algn="ctr"/>
+            <a:r>
+              <a:rPr sz="1200" i="1">
                 <a:solidFill>
                   <a:srgbClr val="555555"/>
                 </a:solidFill>
                 <a:latin typeface="Calibri"/>
               </a:rPr>
-              <a:t>  -  Up to 50 follow-up messages with full context preserved</a:t>
-            </a:r>
-          </a:p>
-          <a:p>
-            <a:pPr algn="l" lvl="1">
-              <a:spcAft>
-                <a:spcPts val="540"/>
-              </a:spcAft>
-            </a:pPr>
-            <a:r>
-              <a:rPr sz="1500">
-                <a:solidFill>
-                  <a:srgbClr val="555555"/>
-                </a:solidFill>
-                <a:latin typeface="Calibri"/>
-              </a:rPr>
-              <a:t>  -  Useful for training, root-cause analysis, or alternate-fix exploration</a:t>
-            </a:r>
-          </a:p>
-          <a:p>
-            <a:pPr algn="l">
-              <a:spcAft>
-                <a:spcPts val="540"/>
-              </a:spcAft>
-            </a:pPr>
-            <a:r>
-              <a:rPr sz="1800">
-                <a:solidFill>
-                  <a:srgbClr val="202020"/>
-                </a:solidFill>
-                <a:latin typeface="Calibri"/>
-              </a:rPr>
-              <a:t>•  Editable Payment Formats  -  add PACS.008, PACS.004, CAMT.053, MT103, etc.</a:t>
-            </a:r>
-          </a:p>
-          <a:p>
-            <a:pPr algn="l">
-              <a:spcAft>
-                <a:spcPts val="540"/>
-              </a:spcAft>
-            </a:pPr>
-            <a:r>
-              <a:rPr sz="1800">
-                <a:solidFill>
-                  <a:srgbClr val="202020"/>
-                </a:solidFill>
-                <a:latin typeface="Calibri"/>
-              </a:rPr>
-              <a:t>•  Editable System Instructions per format  -  ops can tune prompts without a code release</a:t>
-            </a:r>
-          </a:p>
-          <a:p>
-            <a:pPr algn="l">
-              <a:spcAft>
-                <a:spcPts val="540"/>
-              </a:spcAft>
-            </a:pPr>
-            <a:r>
-              <a:rPr sz="1800">
-                <a:solidFill>
-                  <a:srgbClr val="202020"/>
-                </a:solidFill>
-                <a:latin typeface="Calibri"/>
-              </a:rPr>
-              <a:t>•  Editable Repair Prompt Template (shared across all formats)</a:t>
-            </a:r>
-          </a:p>
-          <a:p>
-            <a:pPr algn="l">
-              <a:spcAft>
-                <a:spcPts val="540"/>
-              </a:spcAft>
-            </a:pPr>
-            <a:r>
-              <a:rPr sz="1800">
-                <a:solidFill>
-                  <a:srgbClr val="202020"/>
-                </a:solidFill>
-                <a:latin typeface="Calibri"/>
-              </a:rPr>
-              <a:t>•  Temperature slider  -  synced between Chat and Repair modes</a:t>
-            </a:r>
-          </a:p>
-          <a:p>
-            <a:pPr algn="l">
-              <a:spcAft>
-                <a:spcPts val="540"/>
-              </a:spcAft>
-            </a:pPr>
-            <a:r>
-              <a:rPr sz="1800">
-                <a:solidFill>
-                  <a:srgbClr val="202020"/>
-                </a:solidFill>
-                <a:latin typeface="Calibri"/>
-              </a:rPr>
-              <a:t>•  Settings panel  -  endpoint URL + bearer token, saved in browser localStorage</a:t>
-            </a:r>
-          </a:p>
-          <a:p>
-            <a:pPr algn="l">
-              <a:spcAft>
-                <a:spcPts val="540"/>
-              </a:spcAft>
-            </a:pPr>
-            <a:r>
-              <a:rPr sz="1800">
-                <a:solidFill>
-                  <a:srgbClr val="202020"/>
-                </a:solidFill>
-                <a:latin typeface="Calibri"/>
-              </a:rPr>
-              <a:t>•  All preferences persist locally  -  nothing is sent anywhere except Vertex AI</a:t>
-            </a:r>
-          </a:p>
-        </p:txBody>
-      </p:sp>
-      <p:sp>
-        <p:nvSpPr>
-          <p:cNvPr id="5" name="TextBox 4"/>
+              <a:t>Red line = original (Ccy="EU").  Green line = AI-corrected (Ccy="EUR").  Everything else is preserved unchanged.</a:t>
+            </a:r>
+          </a:p>
+        </p:txBody>
+      </p:sp>
+      <p:sp>
+        <p:nvSpPr>
+          <p:cNvPr id="6" name="TextBox 5"/>
           <p:cNvSpPr txBox="1"/>
           <p:nvPr/>
         </p:nvSpPr>
@@ -4954,7 +5627,7 @@
                   <a:srgbClr val="555555"/>
                 </a:solidFill>
               </a:rPr>
-              <a:t>7 / 8</a:t>
+              <a:t>7 / 12</a:t>
             </a:r>
           </a:p>
         </p:txBody>
@@ -5006,7 +5679,7 @@
                 </a:solidFill>
                 <a:latin typeface="Calibri"/>
               </a:rPr>
-              <a:t>Summary</a:t>
+              <a:t>Example  -  Four Eye Check Verification</a:t>
             </a:r>
           </a:p>
         </p:txBody>
@@ -5055,16 +5728,45 @@
           </a:p>
         </p:txBody>
       </p:sp>
-      <p:sp>
-        <p:nvSpPr>
-          <p:cNvPr id="4" name="TextBox 3"/>
+      <p:pic>
+        <p:nvPicPr>
+          <p:cNvPr id="4" name="Picture 3" descr="04_four_eye_check.png"/>
+          <p:cNvPicPr>
+            <a:picLocks noChangeAspect="1"/>
+          </p:cNvPicPr>
+          <p:nvPr/>
+        </p:nvPicPr>
+        <p:blipFill>
+          <a:blip r:embed="rId2"/>
+          <a:stretch>
+            <a:fillRect/>
+          </a:stretch>
+        </p:blipFill>
+        <p:spPr>
+          <a:xfrm>
+            <a:off x="2524760" y="1554480"/>
+            <a:ext cx="7112000" cy="4572000"/>
+          </a:xfrm>
+          <a:prstGeom prst="rect">
+            <a:avLst/>
+          </a:prstGeom>
+          <a:ln w="9525">
+            <a:solidFill>
+              <a:srgbClr val="CCCCCC"/>
+            </a:solidFill>
+          </a:ln>
+        </p:spPr>
+      </p:pic>
+      <p:sp>
+        <p:nvSpPr>
+          <p:cNvPr id="5" name="TextBox 4"/>
           <p:cNvSpPr txBox="1"/>
           <p:nvPr/>
         </p:nvSpPr>
         <p:spPr>
           <a:xfrm>
-            <a:off x="731520" y="1645920"/>
-            <a:ext cx="10789920" cy="4754880"/>
+            <a:off x="548640" y="6172200"/>
+            <a:ext cx="11064240" cy="365760"/>
           </a:xfrm>
           <a:prstGeom prst="rect">
             <a:avLst/>
@@ -5072,111 +5774,27 @@
           <a:noFill/>
         </p:spPr>
         <p:txBody>
-          <a:bodyPr wrap="square">
+          <a:bodyPr wrap="none">
             <a:spAutoFit/>
           </a:bodyPr>
           <a:lstStyle/>
           <a:p>
-            <a:pPr algn="l">
-              <a:spcAft>
-                <a:spcPts val="810"/>
-              </a:spcAft>
-            </a:pPr>
-            <a:r>
-              <a:rPr sz="2000">
-                <a:solidFill>
-                  <a:srgbClr val="202020"/>
-                </a:solidFill>
-                <a:latin typeface="Calibri"/>
-              </a:rPr>
-              <a:t>•  We built a working proof-of-concept payment repair assistant in one day</a:t>
-            </a:r>
-          </a:p>
-          <a:p>
-            <a:pPr algn="l">
-              <a:spcAft>
-                <a:spcPts val="810"/>
-              </a:spcAft>
-            </a:pPr>
-            <a:r>
-              <a:rPr sz="2000">
-                <a:solidFill>
-                  <a:srgbClr val="202020"/>
-                </a:solidFill>
-                <a:latin typeface="Calibri"/>
-              </a:rPr>
-              <a:t>•  It's a thin, transparent layer on top of Deutsche Bank's hosted Gemini AI</a:t>
-            </a:r>
-          </a:p>
-          <a:p>
-            <a:pPr algn="l">
-              <a:spcAft>
-                <a:spcPts val="810"/>
-              </a:spcAft>
-            </a:pPr>
-            <a:r>
-              <a:rPr sz="2000">
-                <a:solidFill>
-                  <a:srgbClr val="202020"/>
-                </a:solidFill>
-                <a:latin typeface="Calibri"/>
-              </a:rPr>
-              <a:t>•  Operators get instant AI suggestions, a verifiable diff, and a four-eye check</a:t>
-            </a:r>
-          </a:p>
-          <a:p>
-            <a:pPr algn="l">
-              <a:spcAft>
-                <a:spcPts val="810"/>
-              </a:spcAft>
-            </a:pPr>
-            <a:r>
-              <a:rPr sz="2000">
-                <a:solidFill>
-                  <a:srgbClr val="202020"/>
-                </a:solidFill>
-                <a:latin typeface="Calibri"/>
-              </a:rPr>
-              <a:t>•  All controls (prompts, temperature, formats) are editable by ops  -  no code release needed</a:t>
-            </a:r>
-          </a:p>
-          <a:p>
-            <a:pPr algn="l">
-              <a:spcAft>
-                <a:spcPts val="810"/>
-              </a:spcAft>
-            </a:pPr>
-            <a:r>
-              <a:rPr sz="2000">
-                <a:solidFill>
-                  <a:srgbClr val="202020"/>
-                </a:solidFill>
-                <a:latin typeface="Calibri"/>
-              </a:rPr>
-              <a:t>•  Easy to deploy: static site, no backend, no new infrastructure</a:t>
-            </a:r>
-          </a:p>
-          <a:p>
-            <a:pPr algn="l">
-              <a:spcAft>
-                <a:spcPts val="810"/>
-              </a:spcAft>
-            </a:pPr>
-            <a:r>
-              <a:rPr sz="2000">
-                <a:solidFill>
-                  <a:srgbClr val="202020"/>
-                </a:solidFill>
-                <a:latin typeface="Calibri"/>
-              </a:rPr>
-              <a:t>•  Next step: pilot with HVP operators on real (shadow) repair queues</a:t>
-            </a:r>
-          </a:p>
-        </p:txBody>
-      </p:sp>
-      <p:sp>
-        <p:nvSpPr>
-          <p:cNvPr id="5" name="TextBox 4"/>
+            <a:pPr algn="ctr"/>
+            <a:r>
+              <a:rPr sz="1200" i="1">
+                <a:solidFill>
+                  <a:srgbClr val="555555"/>
+                </a:solidFill>
+                <a:latin typeface="Calibri"/>
+              </a:rPr>
+              <a:t>An independent AI pass confirms the repair  -  92% confidence, no additional changes needed.</a:t>
+            </a:r>
+          </a:p>
+        </p:txBody>
+      </p:sp>
+      <p:sp>
+        <p:nvSpPr>
+          <p:cNvPr id="6" name="TextBox 5"/>
           <p:cNvSpPr txBox="1"/>
           <p:nvPr/>
         </p:nvSpPr>
@@ -5203,7 +5821,201 @@
                   <a:srgbClr val="555555"/>
                 </a:solidFill>
               </a:rPr>
-              <a:t>8 / 8</a:t>
+              <a:t>8 / 12</a:t>
+            </a:r>
+          </a:p>
+        </p:txBody>
+      </p:sp>
+    </p:spTree>
+  </p:cSld>
+  <p:clrMapOvr>
+    <a:masterClrMapping/>
+  </p:clrMapOvr>
+</p:sld>
+</file>
+
+<file path=ppt/slides/slide9.xml><?xml version="1.0" encoding="utf-8"?>
+<p:sld xmlns:a="http://schemas.openxmlformats.org/drawingml/2006/main" xmlns:p="http://schemas.openxmlformats.org/presentationml/2006/main" xmlns:r="http://schemas.openxmlformats.org/officeDocument/2006/relationships">
+  <p:cSld>
+    <p:spTree>
+      <p:nvGrpSpPr>
+        <p:cNvPr id="1" name=""/>
+        <p:cNvGrpSpPr/>
+        <p:nvPr/>
+      </p:nvGrpSpPr>
+      <p:grpSpPr/>
+      <p:sp>
+        <p:nvSpPr>
+          <p:cNvPr id="2" name="TextBox 1"/>
+          <p:cNvSpPr txBox="1"/>
+          <p:nvPr/>
+        </p:nvSpPr>
+        <p:spPr>
+          <a:xfrm>
+            <a:off x="548640" y="365760"/>
+            <a:ext cx="11064240" cy="822960"/>
+          </a:xfrm>
+          <a:prstGeom prst="rect">
+            <a:avLst/>
+          </a:prstGeom>
+          <a:noFill/>
+        </p:spPr>
+        <p:txBody>
+          <a:bodyPr wrap="square">
+            <a:spAutoFit/>
+          </a:bodyPr>
+          <a:lstStyle/>
+          <a:p>
+            <a:r>
+              <a:rPr sz="3600" b="1">
+                <a:solidFill>
+                  <a:srgbClr val="1E2978"/>
+                </a:solidFill>
+                <a:latin typeface="Calibri"/>
+              </a:rPr>
+              <a:t>Example  -  Explain It To Me</a:t>
+            </a:r>
+          </a:p>
+        </p:txBody>
+      </p:sp>
+      <p:sp>
+        <p:nvSpPr>
+          <p:cNvPr id="3" name="Rectangle 2"/>
+          <p:cNvSpPr/>
+          <p:nvPr/>
+        </p:nvSpPr>
+        <p:spPr>
+          <a:xfrm>
+            <a:off x="548640" y="1234440"/>
+            <a:ext cx="2286000" cy="38100"/>
+          </a:xfrm>
+          <a:prstGeom prst="rect">
+            <a:avLst/>
+          </a:prstGeom>
+          <a:solidFill>
+            <a:srgbClr val="1E2978"/>
+          </a:solidFill>
+          <a:ln>
+            <a:noFill/>
+          </a:ln>
+          <a:effectLst/>
+        </p:spPr>
+        <p:style>
+          <a:lnRef idx="1">
+            <a:schemeClr val="accent1"/>
+          </a:lnRef>
+          <a:fillRef idx="3">
+            <a:schemeClr val="accent1"/>
+          </a:fillRef>
+          <a:effectRef idx="2">
+            <a:schemeClr val="accent1"/>
+          </a:effectRef>
+          <a:fontRef idx="minor">
+            <a:schemeClr val="lt1"/>
+          </a:fontRef>
+        </p:style>
+        <p:txBody>
+          <a:bodyPr rtlCol="0" anchor="ctr"/>
+          <a:lstStyle/>
+          <a:p>
+            <a:pPr algn="ctr"/>
+          </a:p>
+        </p:txBody>
+      </p:sp>
+      <p:pic>
+        <p:nvPicPr>
+          <p:cNvPr id="4" name="Picture 3" descr="05_explanation.png"/>
+          <p:cNvPicPr>
+            <a:picLocks noChangeAspect="1"/>
+          </p:cNvPicPr>
+          <p:nvPr/>
+        </p:nvPicPr>
+        <p:blipFill>
+          <a:blip r:embed="rId2"/>
+          <a:stretch>
+            <a:fillRect/>
+          </a:stretch>
+        </p:blipFill>
+        <p:spPr>
+          <a:xfrm>
+            <a:off x="2524760" y="1554480"/>
+            <a:ext cx="7112000" cy="4572000"/>
+          </a:xfrm>
+          <a:prstGeom prst="rect">
+            <a:avLst/>
+          </a:prstGeom>
+          <a:ln w="9525">
+            <a:solidFill>
+              <a:srgbClr val="CCCCCC"/>
+            </a:solidFill>
+          </a:ln>
+        </p:spPr>
+      </p:pic>
+      <p:sp>
+        <p:nvSpPr>
+          <p:cNvPr id="5" name="TextBox 4"/>
+          <p:cNvSpPr txBox="1"/>
+          <p:nvPr/>
+        </p:nvSpPr>
+        <p:spPr>
+          <a:xfrm>
+            <a:off x="548640" y="6172200"/>
+            <a:ext cx="11064240" cy="365760"/>
+          </a:xfrm>
+          <a:prstGeom prst="rect">
+            <a:avLst/>
+          </a:prstGeom>
+          <a:noFill/>
+        </p:spPr>
+        <p:txBody>
+          <a:bodyPr wrap="none">
+            <a:spAutoFit/>
+          </a:bodyPr>
+          <a:lstStyle/>
+          <a:p>
+            <a:pPr algn="ctr"/>
+            <a:r>
+              <a:rPr sz="1200" i="1">
+                <a:solidFill>
+                  <a:srgbClr val="555555"/>
+                </a:solidFill>
+                <a:latin typeface="Calibri"/>
+              </a:rPr>
+              <a:t>The AI explains the change in plain payments language so the operator understands why it was needed.</a:t>
+            </a:r>
+          </a:p>
+        </p:txBody>
+      </p:sp>
+      <p:sp>
+        <p:nvSpPr>
+          <p:cNvPr id="6" name="TextBox 5"/>
+          <p:cNvSpPr txBox="1"/>
+          <p:nvPr/>
+        </p:nvSpPr>
+        <p:spPr>
+          <a:xfrm>
+            <a:off x="11155680" y="6446520"/>
+            <a:ext cx="914400" cy="274320"/>
+          </a:xfrm>
+          <a:prstGeom prst="rect">
+            <a:avLst/>
+          </a:prstGeom>
+          <a:noFill/>
+        </p:spPr>
+        <p:txBody>
+          <a:bodyPr wrap="none">
+            <a:spAutoFit/>
+          </a:bodyPr>
+          <a:lstStyle/>
+          <a:p>
+            <a:pPr algn="r"/>
+            <a:r>
+              <a:rPr sz="1000">
+                <a:solidFill>
+                  <a:srgbClr val="555555"/>
+                </a:solidFill>
+              </a:rPr>
+              <a:t>9 / 12</a:t>
             </a:r>
           </a:p>
         </p:txBody>

--- a/Galileo_Payment_Analyzer.pptx
+++ b/Galileo_Payment_Analyzer.pptx
@@ -16,7 +16,6 @@
     <p:sldId id="264" r:id="rId15"/>
     <p:sldId id="265" r:id="rId16"/>
     <p:sldId id="266" r:id="rId17"/>
-    <p:sldId id="267" r:id="rId18"/>
   </p:sldIdLst>
   <p:sldSz cx="12191695" cy="6858000" type="screen4x3"/>
   <p:notesSz cx="6858000" cy="9144000"/>
@@ -3107,7 +3106,7 @@
         </p:nvSpPr>
         <p:spPr>
           <a:xfrm>
-            <a:off x="731520" y="2377440"/>
+            <a:off x="731520" y="2194560"/>
             <a:ext cx="10698480" cy="1371600"/>
           </a:xfrm>
           <a:prstGeom prst="rect">
@@ -3141,8 +3140,8 @@
         </p:nvSpPr>
         <p:spPr>
           <a:xfrm>
-            <a:off x="731520" y="3383280"/>
-            <a:ext cx="10698480" cy="731520"/>
+            <a:off x="731520" y="3200400"/>
+            <a:ext cx="10698480" cy="640080"/>
           </a:xfrm>
           <a:prstGeom prst="rect">
             <a:avLst/>
@@ -3156,13 +3155,13 @@
           <a:lstStyle/>
           <a:p>
             <a:r>
-              <a:rPr sz="2800">
+              <a:rPr sz="2600">
                 <a:solidFill>
                   <a:srgbClr val="202020"/>
                 </a:solidFill>
                 <a:latin typeface="Calibri"/>
               </a:rPr>
-              <a:t>An AI-Powered Payment Repair Assistant</a:t>
+              <a:t>An AI-Assisted Payment Repair Assistant</a:t>
             </a:r>
           </a:p>
         </p:txBody>
@@ -3175,8 +3174,8 @@
         </p:nvSpPr>
         <p:spPr>
           <a:xfrm>
-            <a:off x="731520" y="5029200"/>
-            <a:ext cx="10698480" cy="548640"/>
+            <a:off x="731520" y="4114800"/>
+            <a:ext cx="10698480" cy="457200"/>
           </a:xfrm>
           <a:prstGeom prst="rect">
             <a:avLst/>
@@ -3190,13 +3189,13 @@
           <a:lstStyle/>
           <a:p>
             <a:r>
-              <a:rPr sz="1800">
+              <a:rPr sz="1600" i="1">
                 <a:solidFill>
                   <a:srgbClr val="555555"/>
                 </a:solidFill>
                 <a:latin typeface="Calibri"/>
               </a:rPr>
-              <a:t>Built for High Value Payments  |  Deutsche Bank</a:t>
+              <a:t>Proof of Concept  |  High Value Payments  |  Deutsche Bank</a:t>
             </a:r>
           </a:p>
         </p:txBody>
@@ -3209,7 +3208,7 @@
         </p:nvSpPr>
         <p:spPr>
           <a:xfrm>
-            <a:off x="731520" y="3108960"/>
+            <a:off x="731520" y="2926080"/>
             <a:ext cx="2286000" cy="50800"/>
           </a:xfrm>
           <a:prstGeom prst="rect">
@@ -3292,7 +3291,7 @@
                 </a:solidFill>
                 <a:latin typeface="Calibri"/>
               </a:rPr>
-              <a:t>Features  -  Repair Mode</a:t>
+              <a:t>Security, Compliance &amp; Controls  -  To Be Built</a:t>
             </a:r>
           </a:p>
         </p:txBody>
@@ -3365,145 +3364,177 @@
           <a:p>
             <a:pPr algn="l">
               <a:spcAft>
-                <a:spcPts val="504"/>
+                <a:spcPts val="450"/>
               </a:spcAft>
             </a:pPr>
             <a:r>
-              <a:rPr sz="1800">
+              <a:rPr sz="1500">
                 <a:solidFill>
                   <a:srgbClr val="202020"/>
                 </a:solidFill>
                 <a:latin typeface="Calibri"/>
               </a:rPr>
-              <a:t>•  Paste any payment message  -  PACS, CAMT, MT, etc.</a:t>
+              <a:t>•  Authentication and authorisation:</a:t>
+            </a:r>
+          </a:p>
+          <a:p>
+            <a:pPr algn="l" lvl="1">
+              <a:spcAft>
+                <a:spcPts val="450"/>
+              </a:spcAft>
+            </a:pPr>
+            <a:r>
+              <a:rPr sz="1200">
+                <a:solidFill>
+                  <a:srgbClr val="555555"/>
+                </a:solidFill>
+                <a:latin typeface="Calibri"/>
+              </a:rPr>
+              <a:t>  -  SSO integration, role-based access, per-operator entitlements</a:t>
+            </a:r>
+          </a:p>
+          <a:p>
+            <a:pPr algn="l" lvl="1">
+              <a:spcAft>
+                <a:spcPts val="450"/>
+              </a:spcAft>
+            </a:pPr>
+            <a:r>
+              <a:rPr sz="1200">
+                <a:solidFill>
+                  <a:srgbClr val="555555"/>
+                </a:solidFill>
+                <a:latin typeface="Calibri"/>
+              </a:rPr>
+              <a:t>  -  No hardcoded tokens  -  managed via the bank's secret store</a:t>
             </a:r>
           </a:p>
           <a:p>
             <a:pPr algn="l">
               <a:spcAft>
-                <a:spcPts val="504"/>
+                <a:spcPts val="450"/>
               </a:spcAft>
             </a:pPr>
             <a:r>
-              <a:rPr sz="1800">
+              <a:rPr sz="1500">
                 <a:solidFill>
                   <a:srgbClr val="202020"/>
                 </a:solidFill>
                 <a:latin typeface="Calibri"/>
               </a:rPr>
-              <a:t>•  Normalize step  -  AI cleans up formatting first so the diff is honest</a:t>
+              <a:t>•  Audit and traceability:</a:t>
+            </a:r>
+          </a:p>
+          <a:p>
+            <a:pPr algn="l" lvl="1">
+              <a:spcAft>
+                <a:spcPts val="450"/>
+              </a:spcAft>
+            </a:pPr>
+            <a:r>
+              <a:rPr sz="1200">
+                <a:solidFill>
+                  <a:srgbClr val="555555"/>
+                </a:solidFill>
+                <a:latin typeface="Calibri"/>
+              </a:rPr>
+              <a:t>  -  Every repair logged with operator, model version, prompt version, confidence, and approver</a:t>
+            </a:r>
+          </a:p>
+          <a:p>
+            <a:pPr algn="l" lvl="1">
+              <a:spcAft>
+                <a:spcPts val="450"/>
+              </a:spcAft>
+            </a:pPr>
+            <a:r>
+              <a:rPr sz="1200">
+                <a:solidFill>
+                  <a:srgbClr val="555555"/>
+                </a:solidFill>
+                <a:latin typeface="Calibri"/>
+              </a:rPr>
+              <a:t>  -  Signed before / after pairs for regulatory review</a:t>
             </a:r>
           </a:p>
           <a:p>
             <a:pPr algn="l">
               <a:spcAft>
-                <a:spcPts val="504"/>
+                <a:spcPts val="450"/>
               </a:spcAft>
             </a:pPr>
             <a:r>
-              <a:rPr sz="1800">
+              <a:rPr sz="1500">
                 <a:solidFill>
                   <a:srgbClr val="202020"/>
                 </a:solidFill>
                 <a:latin typeface="Calibri"/>
               </a:rPr>
-              <a:t>•  Repair step  -  AI returns the corrected payment message</a:t>
+              <a:t>•  Compliance:</a:t>
+            </a:r>
+          </a:p>
+          <a:p>
+            <a:pPr algn="l" lvl="1">
+              <a:spcAft>
+                <a:spcPts val="450"/>
+              </a:spcAft>
+            </a:pPr>
+            <a:r>
+              <a:rPr sz="1200">
+                <a:solidFill>
+                  <a:srgbClr val="555555"/>
+                </a:solidFill>
+                <a:latin typeface="Calibri"/>
+              </a:rPr>
+              <a:t>  -  Data residency stays inside the bank  -  no external API calls</a:t>
+            </a:r>
+          </a:p>
+          <a:p>
+            <a:pPr algn="l" lvl="1">
+              <a:spcAft>
+                <a:spcPts val="450"/>
+              </a:spcAft>
+            </a:pPr>
+            <a:r>
+              <a:rPr sz="1200">
+                <a:solidFill>
+                  <a:srgbClr val="555555"/>
+                </a:solidFill>
+                <a:latin typeface="Calibri"/>
+              </a:rPr>
+              <a:t>  -  Sanctions screening hooks before any repair is finalised</a:t>
+            </a:r>
+          </a:p>
+          <a:p>
+            <a:pPr algn="l" lvl="1">
+              <a:spcAft>
+                <a:spcPts val="450"/>
+              </a:spcAft>
+            </a:pPr>
+            <a:r>
+              <a:rPr sz="1200">
+                <a:solidFill>
+                  <a:srgbClr val="555555"/>
+                </a:solidFill>
+                <a:latin typeface="Calibri"/>
+              </a:rPr>
+              <a:t>  -  Alignment with existing four-eye and segregation-of-duties rules</a:t>
             </a:r>
           </a:p>
           <a:p>
             <a:pPr algn="l">
               <a:spcAft>
-                <a:spcPts val="504"/>
+                <a:spcPts val="450"/>
               </a:spcAft>
             </a:pPr>
             <a:r>
-              <a:rPr sz="1800">
+              <a:rPr sz="1500">
                 <a:solidFill>
                   <a:srgbClr val="202020"/>
                 </a:solidFill>
                 <a:latin typeface="Calibri"/>
               </a:rPr>
-              <a:t>•  GitHub-style red/green diff so changes are obvious</a:t>
-            </a:r>
-          </a:p>
-          <a:p>
-            <a:pPr algn="l">
-              <a:spcAft>
-                <a:spcPts val="504"/>
-              </a:spcAft>
-            </a:pPr>
-            <a:r>
-              <a:rPr sz="1800">
-                <a:solidFill>
-                  <a:srgbClr val="202020"/>
-                </a:solidFill>
-                <a:latin typeface="Calibri"/>
-              </a:rPr>
-              <a:t>•  Copy button  -  one click to grab the repaired message</a:t>
-            </a:r>
-          </a:p>
-          <a:p>
-            <a:pPr algn="l">
-              <a:spcAft>
-                <a:spcPts val="504"/>
-              </a:spcAft>
-            </a:pPr>
-            <a:r>
-              <a:rPr sz="1800">
-                <a:solidFill>
-                  <a:srgbClr val="202020"/>
-                </a:solidFill>
-                <a:latin typeface="Calibri"/>
-              </a:rPr>
-              <a:t>•  "Explain it to me" button  -  AI explains every change in plain English</a:t>
-            </a:r>
-          </a:p>
-          <a:p>
-            <a:pPr algn="l">
-              <a:spcAft>
-                <a:spcPts val="504"/>
-              </a:spcAft>
-            </a:pPr>
-            <a:r>
-              <a:rPr sz="1800">
-                <a:solidFill>
-                  <a:srgbClr val="202020"/>
-                </a:solidFill>
-                <a:latin typeface="Calibri"/>
-              </a:rPr>
-              <a:t>•  "Four Eye Check" button  -  independent AI review with a confidence score</a:t>
-            </a:r>
-          </a:p>
-          <a:p>
-            <a:pPr algn="l" lvl="1">
-              <a:spcAft>
-                <a:spcPts val="504"/>
-              </a:spcAft>
-            </a:pPr>
-            <a:r>
-              <a:rPr sz="1500">
-                <a:solidFill>
-                  <a:srgbClr val="555555"/>
-                </a:solidFill>
-                <a:latin typeface="Calibri"/>
-              </a:rPr>
-              <a:t>  -  Green badge &gt;= 80%, amber 50-79%, red below 50%</a:t>
-            </a:r>
-          </a:p>
-          <a:p>
-            <a:pPr algn="l" lvl="1">
-              <a:spcAft>
-                <a:spcPts val="504"/>
-              </a:spcAft>
-            </a:pPr>
-            <a:r>
-              <a:rPr sz="1500">
-                <a:solidFill>
-                  <a:srgbClr val="555555"/>
-                </a:solidFill>
-                <a:latin typeface="Calibri"/>
-              </a:rPr>
-              <a:t>  -  Also lists any additional changes still needed</a:t>
+              <a:t>•  Human-in-the-loop is non-negotiable  -  AI never auto-submits a payment</a:t>
             </a:r>
           </a:p>
         </p:txBody>
@@ -3537,7 +3568,7 @@
                   <a:srgbClr val="555555"/>
                 </a:solidFill>
               </a:rPr>
-              <a:t>10 / 12</a:t>
+              <a:t>10 / 11</a:t>
             </a:r>
           </a:p>
         </p:txBody>
@@ -3589,7 +3620,7 @@
                 </a:solidFill>
                 <a:latin typeface="Calibri"/>
               </a:rPr>
-              <a:t>Features  -  Chat Mode + Controls</a:t>
+              <a:t>Summary</a:t>
             </a:r>
           </a:p>
         </p:txBody>
@@ -3662,7 +3693,7 @@
           <a:p>
             <a:pPr algn="l">
               <a:spcAft>
-                <a:spcPts val="540"/>
+                <a:spcPts val="630"/>
               </a:spcAft>
             </a:pPr>
             <a:r>
@@ -3672,29 +3703,29 @@
                 </a:solidFill>
                 <a:latin typeface="Calibri"/>
               </a:rPr>
-              <a:t>•  Chat Mode for back-and-forth conversation about a payment</a:t>
-            </a:r>
-          </a:p>
-          <a:p>
-            <a:pPr algn="l" lvl="1">
+              <a:t>•  Built a working proof of concept that suggests AI-assisted repairs for fatal payments</a:t>
+            </a:r>
+          </a:p>
+          <a:p>
+            <a:pPr algn="l">
               <a:spcAft>
-                <a:spcPts val="540"/>
+                <a:spcPts val="630"/>
               </a:spcAft>
             </a:pPr>
             <a:r>
-              <a:rPr sz="1500">
-                <a:solidFill>
-                  <a:srgbClr val="555555"/>
-                </a:solidFill>
-                <a:latin typeface="Calibri"/>
-              </a:rPr>
-              <a:t>  -  Up to 50 follow-up messages with full context preserved</a:t>
+              <a:rPr sz="1800">
+                <a:solidFill>
+                  <a:srgbClr val="202020"/>
+                </a:solidFill>
+                <a:latin typeface="Calibri"/>
+              </a:rPr>
+              <a:t>•  Demonstrates real value: faster repairs, plain-English explanations, dual-control review</a:t>
             </a:r>
           </a:p>
           <a:p>
             <a:pPr algn="l">
               <a:spcAft>
-                <a:spcPts val="540"/>
+                <a:spcPts val="630"/>
               </a:spcAft>
             </a:pPr>
             <a:r>
@@ -3704,13 +3735,13 @@
                 </a:solidFill>
                 <a:latin typeface="Calibri"/>
               </a:rPr>
-              <a:t>•  Editable Payment Formats  -  PACS.008, PACS.004, CAMT.053, MT103, etc.</a:t>
+              <a:t>•  Early and exploratory  -  not production-ready, by design</a:t>
             </a:r>
           </a:p>
           <a:p>
             <a:pPr algn="l">
               <a:spcAft>
-                <a:spcPts val="540"/>
+                <a:spcPts val="630"/>
               </a:spcAft>
             </a:pPr>
             <a:r>
@@ -3720,13 +3751,13 @@
                 </a:solidFill>
                 <a:latin typeface="Calibri"/>
               </a:rPr>
-              <a:t>•  Editable System Instructions per format  -  ops can tune prompts without code</a:t>
+              <a:t>•  Clear path forward: queue integration, schema validation, audit trail, security and compliance</a:t>
             </a:r>
           </a:p>
           <a:p>
             <a:pPr algn="l">
               <a:spcAft>
-                <a:spcPts val="540"/>
+                <a:spcPts val="630"/>
               </a:spcAft>
             </a:pPr>
             <a:r>
@@ -3736,13 +3767,13 @@
                 </a:solidFill>
                 <a:latin typeface="Calibri"/>
               </a:rPr>
-              <a:t>•  Editable Repair Prompt Template  -  shared across all formats</a:t>
+              <a:t>•  The exciting question is not 'can AI do this' but 'how do we build the right controls around it'</a:t>
             </a:r>
           </a:p>
           <a:p>
             <a:pPr algn="l">
               <a:spcAft>
-                <a:spcPts val="540"/>
+                <a:spcPts val="630"/>
               </a:spcAft>
             </a:pPr>
             <a:r>
@@ -3752,13 +3783,13 @@
                 </a:solidFill>
                 <a:latin typeface="Calibri"/>
               </a:rPr>
-              <a:t>•  Temperature slider  -  synced between Chat and Repair modes</a:t>
+              <a:t>•  </a:t>
             </a:r>
           </a:p>
           <a:p>
             <a:pPr algn="l">
               <a:spcAft>
-                <a:spcPts val="540"/>
+                <a:spcPts val="630"/>
               </a:spcAft>
             </a:pPr>
             <a:r>
@@ -3768,23 +3799,7 @@
                 </a:solidFill>
                 <a:latin typeface="Calibri"/>
               </a:rPr>
-              <a:t>•  Settings panel  -  endpoint URL + bearer token saved in localStorage</a:t>
-            </a:r>
-          </a:p>
-          <a:p>
-            <a:pPr algn="l">
-              <a:spcAft>
-                <a:spcPts val="540"/>
-              </a:spcAft>
-            </a:pPr>
-            <a:r>
-              <a:rPr sz="1800">
-                <a:solidFill>
-                  <a:srgbClr val="202020"/>
-                </a:solidFill>
-                <a:latin typeface="Calibri"/>
-              </a:rPr>
-              <a:t>•  Nothing leaves the browser except calls to Vertex AI</a:t>
+              <a:t>•  Thank you  -  questions?</a:t>
             </a:r>
           </a:p>
         </p:txBody>
@@ -3818,256 +3833,7 @@
                   <a:srgbClr val="555555"/>
                 </a:solidFill>
               </a:rPr>
-              <a:t>11 / 12</a:t>
-            </a:r>
-          </a:p>
-        </p:txBody>
-      </p:sp>
-    </p:spTree>
-  </p:cSld>
-  <p:clrMapOvr>
-    <a:masterClrMapping/>
-  </p:clrMapOvr>
-</p:sld>
-</file>
-
-<file path=ppt/slides/slide12.xml><?xml version="1.0" encoding="utf-8"?>
-<p:sld xmlns:a="http://schemas.openxmlformats.org/drawingml/2006/main" xmlns:p="http://schemas.openxmlformats.org/presentationml/2006/main" xmlns:r="http://schemas.openxmlformats.org/officeDocument/2006/relationships">
-  <p:cSld>
-    <p:spTree>
-      <p:nvGrpSpPr>
-        <p:cNvPr id="1" name=""/>
-        <p:cNvGrpSpPr/>
-        <p:nvPr/>
-      </p:nvGrpSpPr>
-      <p:grpSpPr/>
-      <p:sp>
-        <p:nvSpPr>
-          <p:cNvPr id="2" name="TextBox 1"/>
-          <p:cNvSpPr txBox="1"/>
-          <p:nvPr/>
-        </p:nvSpPr>
-        <p:spPr>
-          <a:xfrm>
-            <a:off x="548640" y="365760"/>
-            <a:ext cx="11064240" cy="822960"/>
-          </a:xfrm>
-          <a:prstGeom prst="rect">
-            <a:avLst/>
-          </a:prstGeom>
-          <a:noFill/>
-        </p:spPr>
-        <p:txBody>
-          <a:bodyPr wrap="square">
-            <a:spAutoFit/>
-          </a:bodyPr>
-          <a:lstStyle/>
-          <a:p>
-            <a:r>
-              <a:rPr sz="3600" b="1">
-                <a:solidFill>
-                  <a:srgbClr val="1E2978"/>
-                </a:solidFill>
-                <a:latin typeface="Calibri"/>
-              </a:rPr>
-              <a:t>Summary</a:t>
-            </a:r>
-          </a:p>
-        </p:txBody>
-      </p:sp>
-      <p:sp>
-        <p:nvSpPr>
-          <p:cNvPr id="3" name="Rectangle 2"/>
-          <p:cNvSpPr/>
-          <p:nvPr/>
-        </p:nvSpPr>
-        <p:spPr>
-          <a:xfrm>
-            <a:off x="548640" y="1234440"/>
-            <a:ext cx="2286000" cy="38100"/>
-          </a:xfrm>
-          <a:prstGeom prst="rect">
-            <a:avLst/>
-          </a:prstGeom>
-          <a:solidFill>
-            <a:srgbClr val="1E2978"/>
-          </a:solidFill>
-          <a:ln>
-            <a:noFill/>
-          </a:ln>
-          <a:effectLst/>
-        </p:spPr>
-        <p:style>
-          <a:lnRef idx="1">
-            <a:schemeClr val="accent1"/>
-          </a:lnRef>
-          <a:fillRef idx="3">
-            <a:schemeClr val="accent1"/>
-          </a:fillRef>
-          <a:effectRef idx="2">
-            <a:schemeClr val="accent1"/>
-          </a:effectRef>
-          <a:fontRef idx="minor">
-            <a:schemeClr val="lt1"/>
-          </a:fontRef>
-        </p:style>
-        <p:txBody>
-          <a:bodyPr rtlCol="0" anchor="ctr"/>
-          <a:lstStyle/>
-          <a:p>
-            <a:pPr algn="ctr"/>
-          </a:p>
-        </p:txBody>
-      </p:sp>
-      <p:sp>
-        <p:nvSpPr>
-          <p:cNvPr id="4" name="TextBox 3"/>
-          <p:cNvSpPr txBox="1"/>
-          <p:nvPr/>
-        </p:nvSpPr>
-        <p:spPr>
-          <a:xfrm>
-            <a:off x="731520" y="1645920"/>
-            <a:ext cx="10789920" cy="4754880"/>
-          </a:xfrm>
-          <a:prstGeom prst="rect">
-            <a:avLst/>
-          </a:prstGeom>
-          <a:noFill/>
-        </p:spPr>
-        <p:txBody>
-          <a:bodyPr wrap="square">
-            <a:spAutoFit/>
-          </a:bodyPr>
-          <a:lstStyle/>
-          <a:p>
-            <a:pPr algn="l">
-              <a:spcAft>
-                <a:spcPts val="810"/>
-              </a:spcAft>
-            </a:pPr>
-            <a:r>
-              <a:rPr sz="2000">
-                <a:solidFill>
-                  <a:srgbClr val="202020"/>
-                </a:solidFill>
-                <a:latin typeface="Calibri"/>
-              </a:rPr>
-              <a:t>•  We built a working proof-of-concept payment repair assistant</a:t>
-            </a:r>
-          </a:p>
-          <a:p>
-            <a:pPr algn="l">
-              <a:spcAft>
-                <a:spcPts val="810"/>
-              </a:spcAft>
-            </a:pPr>
-            <a:r>
-              <a:rPr sz="2000">
-                <a:solidFill>
-                  <a:srgbClr val="202020"/>
-                </a:solidFill>
-                <a:latin typeface="Calibri"/>
-              </a:rPr>
-              <a:t>•  Thin, transparent layer on top of Deutsche Bank's hosted Gemini AI</a:t>
-            </a:r>
-          </a:p>
-          <a:p>
-            <a:pPr algn="l">
-              <a:spcAft>
-                <a:spcPts val="810"/>
-              </a:spcAft>
-            </a:pPr>
-            <a:r>
-              <a:rPr sz="2000">
-                <a:solidFill>
-                  <a:srgbClr val="202020"/>
-                </a:solidFill>
-                <a:latin typeface="Calibri"/>
-              </a:rPr>
-              <a:t>•  Operators get instant AI suggestions, a verifiable diff, and a four-eye check</a:t>
-            </a:r>
-          </a:p>
-          <a:p>
-            <a:pPr algn="l">
-              <a:spcAft>
-                <a:spcPts val="810"/>
-              </a:spcAft>
-            </a:pPr>
-            <a:r>
-              <a:rPr sz="2000">
-                <a:solidFill>
-                  <a:srgbClr val="202020"/>
-                </a:solidFill>
-                <a:latin typeface="Calibri"/>
-              </a:rPr>
-              <a:t>•  All controls (prompts, temperature, formats) editable by ops  -  no code release</a:t>
-            </a:r>
-          </a:p>
-          <a:p>
-            <a:pPr algn="l">
-              <a:spcAft>
-                <a:spcPts val="810"/>
-              </a:spcAft>
-            </a:pPr>
-            <a:r>
-              <a:rPr sz="2000">
-                <a:solidFill>
-                  <a:srgbClr val="202020"/>
-                </a:solidFill>
-                <a:latin typeface="Calibri"/>
-              </a:rPr>
-              <a:t>•  Easy to deploy: static site, no backend, no new infrastructure</a:t>
-            </a:r>
-          </a:p>
-          <a:p>
-            <a:pPr algn="l">
-              <a:spcAft>
-                <a:spcPts val="810"/>
-              </a:spcAft>
-            </a:pPr>
-            <a:r>
-              <a:rPr sz="2000">
-                <a:solidFill>
-                  <a:srgbClr val="202020"/>
-                </a:solidFill>
-                <a:latin typeface="Calibri"/>
-              </a:rPr>
-              <a:t>•  Next step: pilot with HVP operators on real (shadow) repair queues</a:t>
-            </a:r>
-          </a:p>
-        </p:txBody>
-      </p:sp>
-      <p:sp>
-        <p:nvSpPr>
-          <p:cNvPr id="5" name="TextBox 4"/>
-          <p:cNvSpPr txBox="1"/>
-          <p:nvPr/>
-        </p:nvSpPr>
-        <p:spPr>
-          <a:xfrm>
-            <a:off x="11155680" y="6446520"/>
-            <a:ext cx="914400" cy="274320"/>
-          </a:xfrm>
-          <a:prstGeom prst="rect">
-            <a:avLst/>
-          </a:prstGeom>
-          <a:noFill/>
-        </p:spPr>
-        <p:txBody>
-          <a:bodyPr wrap="none">
-            <a:spAutoFit/>
-          </a:bodyPr>
-          <a:lstStyle/>
-          <a:p>
-            <a:pPr algn="r"/>
-            <a:r>
-              <a:rPr sz="1000">
-                <a:solidFill>
-                  <a:srgbClr val="555555"/>
-                </a:solidFill>
-              </a:rPr>
-              <a:t>12 / 12</a:t>
+              <a:t>11 / 11</a:t>
             </a:r>
           </a:p>
         </p:txBody>
@@ -4119,7 +3885,7 @@
                 </a:solidFill>
                 <a:latin typeface="Calibri"/>
               </a:rPr>
-              <a:t>What We Built Today</a:t>
+              <a:t>The Problem  -  Fatal Payments</a:t>
             </a:r>
           </a:p>
         </p:txBody>
@@ -4176,8 +3942,8 @@
         </p:nvSpPr>
         <p:spPr>
           <a:xfrm>
-            <a:off x="548640" y="1645920"/>
-            <a:ext cx="5303520" cy="4754880"/>
+            <a:off x="731520" y="1645920"/>
+            <a:ext cx="10789920" cy="4754880"/>
           </a:xfrm>
           <a:prstGeom prst="rect">
             <a:avLst/>
@@ -4196,13 +3962,13 @@
               </a:spcAft>
             </a:pPr>
             <a:r>
-              <a:rPr sz="1600">
+              <a:rPr sz="1700">
                 <a:solidFill>
                   <a:srgbClr val="202020"/>
                 </a:solidFill>
                 <a:latin typeface="Calibri"/>
               </a:rPr>
-              <a:t>•  A web app that helps analysts repair fatal payment messages using AI</a:t>
+              <a:t>•  Deutsche Bank processes billions of euros in payments every day</a:t>
             </a:r>
           </a:p>
           <a:p>
@@ -4212,13 +3978,29 @@
               </a:spcAft>
             </a:pPr>
             <a:r>
-              <a:rPr sz="1600">
+              <a:rPr sz="1700">
                 <a:solidFill>
                   <a:srgbClr val="202020"/>
                 </a:solidFill>
                 <a:latin typeface="Calibri"/>
               </a:rPr>
-              <a:t>•  Two modes inside one tool:</a:t>
+              <a:t>•  Even at a 99.5% straight-through rate, that leaves thousands of transactions for manual repair daily</a:t>
+            </a:r>
+          </a:p>
+          <a:p>
+            <a:pPr algn="l">
+              <a:spcAft>
+                <a:spcPts val="540"/>
+              </a:spcAft>
+            </a:pPr>
+            <a:r>
+              <a:rPr sz="1700">
+                <a:solidFill>
+                  <a:srgbClr val="202020"/>
+                </a:solidFill>
+                <a:latin typeface="Calibri"/>
+              </a:rPr>
+              <a:t>•  Each one falls into the repair queue because of small errors:</a:t>
             </a:r>
           </a:p>
           <a:p>
@@ -4228,13 +4010,29 @@
               </a:spcAft>
             </a:pPr>
             <a:r>
-              <a:rPr sz="1300">
+              <a:rPr sz="1400">
                 <a:solidFill>
                   <a:srgbClr val="555555"/>
                 </a:solidFill>
                 <a:latin typeface="Calibri"/>
               </a:rPr>
-              <a:t>  -  Chat Mode  -  ask the AI about a payment message</a:t>
+              <a:t>  -  A wrong currency code, a malformed BIC, an invalid charge bearer enum</a:t>
+            </a:r>
+          </a:p>
+          <a:p>
+            <a:pPr algn="l">
+              <a:spcAft>
+                <a:spcPts val="540"/>
+              </a:spcAft>
+            </a:pPr>
+            <a:r>
+              <a:rPr sz="1700">
+                <a:solidFill>
+                  <a:srgbClr val="202020"/>
+                </a:solidFill>
+                <a:latin typeface="Calibri"/>
+              </a:rPr>
+              <a:t>•  Each is repaired manually:</a:t>
             </a:r>
           </a:p>
           <a:p>
@@ -4244,13 +4042,29 @@
               </a:spcAft>
             </a:pPr>
             <a:r>
-              <a:rPr sz="1300">
+              <a:rPr sz="1400">
                 <a:solidFill>
                   <a:srgbClr val="555555"/>
                 </a:solidFill>
                 <a:latin typeface="Calibri"/>
               </a:rPr>
-              <a:t>  -  Repair Mode  -  auto-correct and show the diff</a:t>
+              <a:t>  -  Operator opens the message  -  reads the XML  -  spots the error  -  types the fix</a:t>
+            </a:r>
+          </a:p>
+          <a:p>
+            <a:pPr algn="l" lvl="1">
+              <a:spcAft>
+                <a:spcPts val="540"/>
+              </a:spcAft>
+            </a:pPr>
+            <a:r>
+              <a:rPr sz="1400">
+                <a:solidFill>
+                  <a:srgbClr val="555555"/>
+                </a:solidFill>
+                <a:latin typeface="Calibri"/>
+              </a:rPr>
+              <a:t>  -  A second operator reviews and approves (four-eye control)</a:t>
             </a:r>
           </a:p>
           <a:p>
@@ -4260,72 +4074,27 @@
               </a:spcAft>
             </a:pPr>
             <a:r>
-              <a:rPr sz="1600">
+              <a:rPr sz="1700">
                 <a:solidFill>
                   <a:srgbClr val="202020"/>
                 </a:solidFill>
                 <a:latin typeface="Calibri"/>
               </a:rPr>
-              <a:t>•  Built as a static website (HTML, CSS, JavaScript)</a:t>
-            </a:r>
-          </a:p>
-          <a:p>
-            <a:pPr algn="l">
-              <a:spcAft>
-                <a:spcPts val="540"/>
-              </a:spcAft>
-            </a:pPr>
-            <a:r>
-              <a:rPr sz="1600">
-                <a:solidFill>
-                  <a:srgbClr val="202020"/>
-                </a:solidFill>
-                <a:latin typeface="Calibri"/>
-              </a:rPr>
-              <a:t>•  Runs in the browser, calls Deutsche Bank's Vertex AI endpoint</a:t>
-            </a:r>
-          </a:p>
-        </p:txBody>
-      </p:sp>
-      <p:pic>
-        <p:nvPicPr>
-          <p:cNvPr id="5" name="Picture 4" descr="01_home_chat.png"/>
-          <p:cNvPicPr>
-            <a:picLocks noChangeAspect="1"/>
-          </p:cNvPicPr>
-          <p:nvPr/>
-        </p:nvPicPr>
-        <p:blipFill>
-          <a:blip r:embed="rId2"/>
-          <a:stretch>
-            <a:fillRect/>
-          </a:stretch>
-        </p:blipFill>
-        <p:spPr>
-          <a:xfrm>
-            <a:off x="6126480" y="1988820"/>
-            <a:ext cx="5760720" cy="3703320"/>
-          </a:xfrm>
-          <a:prstGeom prst="rect">
-            <a:avLst/>
-          </a:prstGeom>
-          <a:ln w="9525">
-            <a:solidFill>
-              <a:srgbClr val="CCCCCC"/>
-            </a:solidFill>
-          </a:ln>
-        </p:spPr>
-      </p:pic>
-      <p:sp>
-        <p:nvSpPr>
-          <p:cNvPr id="6" name="TextBox 5"/>
+              <a:t>•  Slow, error-prone, and SLA-critical  -  can AI help operators get to the fix faster?</a:t>
+            </a:r>
+          </a:p>
+        </p:txBody>
+      </p:sp>
+      <p:sp>
+        <p:nvSpPr>
+          <p:cNvPr id="5" name="TextBox 4"/>
           <p:cNvSpPr txBox="1"/>
           <p:nvPr/>
         </p:nvSpPr>
         <p:spPr>
           <a:xfrm>
-            <a:off x="6126480" y="6172200"/>
-            <a:ext cx="5760720" cy="365760"/>
+            <a:off x="11155680" y="6446520"/>
+            <a:ext cx="914400" cy="274320"/>
           </a:xfrm>
           <a:prstGeom prst="rect">
             <a:avLst/>
@@ -4338,49 +4107,14 @@
           </a:bodyPr>
           <a:lstStyle/>
           <a:p>
-            <a:pPr algn="ctr"/>
-            <a:r>
-              <a:rPr sz="1200" i="1">
+            <a:pPr algn="r"/>
+            <a:r>
+              <a:rPr sz="1000">
                 <a:solidFill>
                   <a:srgbClr val="555555"/>
                 </a:solidFill>
-                <a:latin typeface="Calibri"/>
-              </a:rPr>
-              <a:t>Home view  -  Chat Mode tab selected</a:t>
-            </a:r>
-          </a:p>
-        </p:txBody>
-      </p:sp>
-      <p:sp>
-        <p:nvSpPr>
-          <p:cNvPr id="7" name="TextBox 6"/>
-          <p:cNvSpPr txBox="1"/>
-          <p:nvPr/>
-        </p:nvSpPr>
-        <p:spPr>
-          <a:xfrm>
-            <a:off x="11155680" y="6446520"/>
-            <a:ext cx="914400" cy="274320"/>
-          </a:xfrm>
-          <a:prstGeom prst="rect">
-            <a:avLst/>
-          </a:prstGeom>
-          <a:noFill/>
-        </p:spPr>
-        <p:txBody>
-          <a:bodyPr wrap="none">
-            <a:spAutoFit/>
-          </a:bodyPr>
-          <a:lstStyle/>
-          <a:p>
-            <a:pPr algn="r"/>
-            <a:r>
-              <a:rPr sz="1000">
-                <a:solidFill>
-                  <a:srgbClr val="555555"/>
-                </a:solidFill>
-              </a:rPr>
-              <a:t>2 / 12</a:t>
+              </a:rPr>
+              <a:t>2 / 11</a:t>
             </a:r>
           </a:p>
         </p:txBody>
@@ -4432,7 +4166,7 @@
                 </a:solidFill>
                 <a:latin typeface="Calibri"/>
               </a:rPr>
-              <a:t>How AI Endpoints Work (in general)</a:t>
+              <a:t>What We Built</a:t>
             </a:r>
           </a:p>
         </p:txBody>
@@ -4489,8 +4223,8 @@
         </p:nvSpPr>
         <p:spPr>
           <a:xfrm>
-            <a:off x="731520" y="1645920"/>
-            <a:ext cx="10789920" cy="4754880"/>
+            <a:off x="548640" y="1645920"/>
+            <a:ext cx="5303520" cy="4754880"/>
           </a:xfrm>
           <a:prstGeom prst="rect">
             <a:avLst/>
@@ -4505,143 +4239,140 @@
           <a:p>
             <a:pPr algn="l">
               <a:spcAft>
-                <a:spcPts val="810"/>
+                <a:spcPts val="630"/>
               </a:spcAft>
             </a:pPr>
             <a:r>
-              <a:rPr sz="2000">
+              <a:rPr sz="1600">
                 <a:solidFill>
                   <a:srgbClr val="202020"/>
                 </a:solidFill>
                 <a:latin typeface="Calibri"/>
               </a:rPr>
-              <a:t>•  An AI endpoint is just a web URL you can send a request to</a:t>
+              <a:t>•  A simple web app that suggests repairs for fatal payment messages</a:t>
             </a:r>
           </a:p>
           <a:p>
             <a:pPr algn="l">
               <a:spcAft>
-                <a:spcPts val="810"/>
+                <a:spcPts val="630"/>
               </a:spcAft>
             </a:pPr>
             <a:r>
-              <a:rPr sz="2000">
+              <a:rPr sz="1600">
                 <a:solidFill>
                   <a:srgbClr val="202020"/>
                 </a:solidFill>
                 <a:latin typeface="Calibri"/>
               </a:rPr>
-              <a:t>•  You POST a JSON request with three main parts:</a:t>
-            </a:r>
-          </a:p>
-          <a:p>
-            <a:pPr algn="l" lvl="1">
+              <a:t>•  Operator pastes a broken payment, AI returns a corrected version</a:t>
+            </a:r>
+          </a:p>
+          <a:p>
+            <a:pPr algn="l">
               <a:spcAft>
-                <a:spcPts val="810"/>
+                <a:spcPts val="630"/>
               </a:spcAft>
             </a:pPr>
             <a:r>
-              <a:rPr sz="1700">
-                <a:solidFill>
-                  <a:srgbClr val="555555"/>
-                </a:solidFill>
-                <a:latin typeface="Calibri"/>
-              </a:rPr>
-              <a:t>  -  prompt  -  the text/data you want the AI to look at</a:t>
-            </a:r>
-          </a:p>
-          <a:p>
-            <a:pPr algn="l" lvl="1">
+              <a:rPr sz="1600">
+                <a:solidFill>
+                  <a:srgbClr val="202020"/>
+                </a:solidFill>
+                <a:latin typeface="Calibri"/>
+              </a:rPr>
+              <a:t>•  Shows a clear before / after diff so the operator can verify the change</a:t>
+            </a:r>
+          </a:p>
+          <a:p>
+            <a:pPr algn="l">
               <a:spcAft>
-                <a:spcPts val="810"/>
+                <a:spcPts val="630"/>
               </a:spcAft>
             </a:pPr>
             <a:r>
-              <a:rPr sz="1700">
-                <a:solidFill>
-                  <a:srgbClr val="555555"/>
-                </a:solidFill>
-                <a:latin typeface="Calibri"/>
-              </a:rPr>
-              <a:t>  -  system_instruction  -  the role/task you want the AI to perform</a:t>
-            </a:r>
-          </a:p>
-          <a:p>
-            <a:pPr algn="l" lvl="1">
+              <a:rPr sz="1600">
+                <a:solidFill>
+                  <a:srgbClr val="202020"/>
+                </a:solidFill>
+                <a:latin typeface="Calibri"/>
+              </a:rPr>
+              <a:t>•  Built quickly as an exploratory proof of concept</a:t>
+            </a:r>
+          </a:p>
+          <a:p>
+            <a:pPr algn="l">
               <a:spcAft>
-                <a:spcPts val="810"/>
+                <a:spcPts val="630"/>
               </a:spcAft>
             </a:pPr>
             <a:r>
-              <a:rPr sz="1700">
-                <a:solidFill>
-                  <a:srgbClr val="555555"/>
-                </a:solidFill>
-                <a:latin typeface="Calibri"/>
-              </a:rPr>
-              <a:t>  -  temperature  -  how creative vs. deterministic (0 = strict, 1 = creative)</a:t>
+              <a:rPr sz="1600">
+                <a:solidFill>
+                  <a:srgbClr val="202020"/>
+                </a:solidFill>
+                <a:latin typeface="Calibri"/>
+              </a:rPr>
+              <a:t>•  Uses Deutsche Bank's hosted AI endpoint  -  no external services</a:t>
             </a:r>
           </a:p>
           <a:p>
             <a:pPr algn="l">
               <a:spcAft>
-                <a:spcPts val="810"/>
+                <a:spcPts val="630"/>
               </a:spcAft>
             </a:pPr>
             <a:r>
-              <a:rPr sz="2000">
+              <a:rPr sz="1600">
                 <a:solidFill>
                   <a:srgbClr val="202020"/>
                 </a:solidFill>
                 <a:latin typeface="Calibri"/>
               </a:rPr>
-              <a:t>•  The endpoint returns a JSON response with the AI's text reply</a:t>
-            </a:r>
-          </a:p>
-          <a:p>
-            <a:pPr algn="l">
-              <a:spcAft>
-                <a:spcPts val="810"/>
-              </a:spcAft>
-            </a:pPr>
-            <a:r>
-              <a:rPr sz="2000">
-                <a:solidFill>
-                  <a:srgbClr val="202020"/>
-                </a:solidFill>
-                <a:latin typeface="Calibri"/>
-              </a:rPr>
-              <a:t>•  Authentication is handled with a bearer token in the request header</a:t>
-            </a:r>
-          </a:p>
-          <a:p>
-            <a:pPr algn="l">
-              <a:spcAft>
-                <a:spcPts val="810"/>
-              </a:spcAft>
-            </a:pPr>
-            <a:r>
-              <a:rPr sz="2000">
-                <a:solidFill>
-                  <a:srgbClr val="202020"/>
-                </a:solidFill>
-                <a:latin typeface="Calibri"/>
-              </a:rPr>
-              <a:t>•  Same pattern works for OpenAI, Anthropic Claude, Google Gemini, etc.</a:t>
-            </a:r>
-          </a:p>
-        </p:txBody>
-      </p:sp>
-      <p:sp>
-        <p:nvSpPr>
-          <p:cNvPr id="5" name="TextBox 4"/>
+              <a:t>•  Operator always stays in control  -  AI suggests, the human approves</a:t>
+            </a:r>
+          </a:p>
+        </p:txBody>
+      </p:sp>
+      <p:pic>
+        <p:nvPicPr>
+          <p:cNvPr id="5" name="Picture 4" descr="01_home_chat.png"/>
+          <p:cNvPicPr>
+            <a:picLocks noChangeAspect="1"/>
+          </p:cNvPicPr>
+          <p:nvPr/>
+        </p:nvPicPr>
+        <p:blipFill>
+          <a:blip r:embed="rId2"/>
+          <a:stretch>
+            <a:fillRect/>
+          </a:stretch>
+        </p:blipFill>
+        <p:spPr>
+          <a:xfrm>
+            <a:off x="6126480" y="1988820"/>
+            <a:ext cx="5760720" cy="3703320"/>
+          </a:xfrm>
+          <a:prstGeom prst="rect">
+            <a:avLst/>
+          </a:prstGeom>
+          <a:ln w="9525">
+            <a:solidFill>
+              <a:srgbClr val="CCCCCC"/>
+            </a:solidFill>
+          </a:ln>
+        </p:spPr>
+      </p:pic>
+      <p:sp>
+        <p:nvSpPr>
+          <p:cNvPr id="6" name="TextBox 5"/>
           <p:cNvSpPr txBox="1"/>
           <p:nvPr/>
         </p:nvSpPr>
         <p:spPr>
           <a:xfrm>
-            <a:off x="11155680" y="6446520"/>
-            <a:ext cx="914400" cy="274320"/>
+            <a:off x="6126480" y="6172200"/>
+            <a:ext cx="5760720" cy="365760"/>
           </a:xfrm>
           <a:prstGeom prst="rect">
             <a:avLst/>
@@ -4654,6 +4385,41 @@
           </a:bodyPr>
           <a:lstStyle/>
           <a:p>
+            <a:pPr algn="ctr"/>
+            <a:r>
+              <a:rPr sz="1200" i="1">
+                <a:solidFill>
+                  <a:srgbClr val="555555"/>
+                </a:solidFill>
+                <a:latin typeface="Calibri"/>
+              </a:rPr>
+              <a:t>The Galileo Payment Analyzer interface</a:t>
+            </a:r>
+          </a:p>
+        </p:txBody>
+      </p:sp>
+      <p:sp>
+        <p:nvSpPr>
+          <p:cNvPr id="7" name="TextBox 6"/>
+          <p:cNvSpPr txBox="1"/>
+          <p:nvPr/>
+        </p:nvSpPr>
+        <p:spPr>
+          <a:xfrm>
+            <a:off x="11155680" y="6446520"/>
+            <a:ext cx="914400" cy="274320"/>
+          </a:xfrm>
+          <a:prstGeom prst="rect">
+            <a:avLst/>
+          </a:prstGeom>
+          <a:noFill/>
+        </p:spPr>
+        <p:txBody>
+          <a:bodyPr wrap="none">
+            <a:spAutoFit/>
+          </a:bodyPr>
+          <a:lstStyle/>
+          <a:p>
             <a:pPr algn="r"/>
             <a:r>
               <a:rPr sz="1000">
@@ -4661,7 +4427,7 @@
                   <a:srgbClr val="555555"/>
                 </a:solidFill>
               </a:rPr>
-              <a:t>3 / 12</a:t>
+              <a:t>3 / 11</a:t>
             </a:r>
           </a:p>
         </p:txBody>
@@ -4713,7 +4479,7 @@
                 </a:solidFill>
                 <a:latin typeface="Calibri"/>
               </a:rPr>
-              <a:t>How We Are Using Gemini AI</a:t>
+              <a:t>How AI Helps</a:t>
             </a:r>
           </a:p>
         </p:txBody>
@@ -4786,7 +4552,7 @@
           <a:p>
             <a:pPr algn="l">
               <a:spcAft>
-                <a:spcPts val="540"/>
+                <a:spcPts val="576"/>
               </a:spcAft>
             </a:pPr>
             <a:r>
@@ -4796,13 +4562,13 @@
                 </a:solidFill>
                 <a:latin typeface="Calibri"/>
               </a:rPr>
-              <a:t>•  Deutsche Bank hosts Gemini through Google Vertex AI</a:t>
+              <a:t>•  AI models are good at pattern recognition  -  they have seen enormous amounts of structured text</a:t>
             </a:r>
           </a:p>
           <a:p>
             <a:pPr algn="l">
               <a:spcAft>
-                <a:spcPts val="540"/>
+                <a:spcPts val="576"/>
               </a:spcAft>
             </a:pPr>
             <a:r>
@@ -4812,13 +4578,13 @@
                 </a:solidFill>
                 <a:latin typeface="Calibri"/>
               </a:rPr>
-              <a:t>•  We call the endpoint directly from the browser with a bearer token</a:t>
+              <a:t>•  Payment messages are structured text  -  PACS, CAMT, MT  -  with strict format rules</a:t>
             </a:r>
           </a:p>
           <a:p>
             <a:pPr algn="l">
               <a:spcAft>
-                <a:spcPts val="540"/>
+                <a:spcPts val="576"/>
               </a:spcAft>
             </a:pPr>
             <a:r>
@@ -4828,13 +4594,29 @@
                 </a:solidFill>
                 <a:latin typeface="Calibri"/>
               </a:rPr>
-              <a:t>•  Every action sends the same JSON request shape:</a:t>
+              <a:t>•  The AI is asked to act as a payments domain expert and return only the corrected message</a:t>
+            </a:r>
+          </a:p>
+          <a:p>
+            <a:pPr algn="l">
+              <a:spcAft>
+                <a:spcPts val="576"/>
+              </a:spcAft>
+            </a:pPr>
+            <a:r>
+              <a:rPr sz="1800">
+                <a:solidFill>
+                  <a:srgbClr val="202020"/>
+                </a:solidFill>
+                <a:latin typeface="Calibri"/>
+              </a:rPr>
+              <a:t>•  Strengths today:</a:t>
             </a:r>
           </a:p>
           <a:p>
             <a:pPr algn="l" lvl="1">
               <a:spcAft>
-                <a:spcPts val="540"/>
+                <a:spcPts val="576"/>
               </a:spcAft>
             </a:pPr>
             <a:r>
@@ -4844,13 +4626,45 @@
                 </a:solidFill>
                 <a:latin typeface="Calibri"/>
               </a:rPr>
-              <a:t>  -  { "prompt": "...", "temperature": 0.20, "system_instruction": "..." }</a:t>
+              <a:t>  -  Catches typos in static fields (currency, country, BIC)</a:t>
+            </a:r>
+          </a:p>
+          <a:p>
+            <a:pPr algn="l" lvl="1">
+              <a:spcAft>
+                <a:spcPts val="576"/>
+              </a:spcAft>
+            </a:pPr>
+            <a:r>
+              <a:rPr sz="1500">
+                <a:solidFill>
+                  <a:srgbClr val="555555"/>
+                </a:solidFill>
+                <a:latin typeface="Calibri"/>
+              </a:rPr>
+              <a:t>  -  Knows ISO 4217 / 3166 / SWIFT enumerations</a:t>
+            </a:r>
+          </a:p>
+          <a:p>
+            <a:pPr algn="l" lvl="1">
+              <a:spcAft>
+                <a:spcPts val="576"/>
+              </a:spcAft>
+            </a:pPr>
+            <a:r>
+              <a:rPr sz="1500">
+                <a:solidFill>
+                  <a:srgbClr val="555555"/>
+                </a:solidFill>
+                <a:latin typeface="Calibri"/>
+              </a:rPr>
+              <a:t>  -  Can explain why a change was made in plain English</a:t>
             </a:r>
           </a:p>
           <a:p>
             <a:pPr algn="l">
               <a:spcAft>
-                <a:spcPts val="540"/>
+                <a:spcPts val="576"/>
               </a:spcAft>
             </a:pPr>
             <a:r>
@@ -4860,71 +4674,7 @@
                 </a:solidFill>
                 <a:latin typeface="Calibri"/>
               </a:rPr>
-              <a:t>•  What changes between actions is the system_instruction:</a:t>
-            </a:r>
-          </a:p>
-          <a:p>
-            <a:pPr algn="l" lvl="1">
-              <a:spcAft>
-                <a:spcPts val="540"/>
-              </a:spcAft>
-            </a:pPr>
-            <a:r>
-              <a:rPr sz="1500">
-                <a:solidFill>
-                  <a:srgbClr val="555555"/>
-                </a:solidFill>
-                <a:latin typeface="Calibri"/>
-              </a:rPr>
-              <a:t>  -  Chat Mode uses a payments-analyst persona</a:t>
-            </a:r>
-          </a:p>
-          <a:p>
-            <a:pPr algn="l" lvl="1">
-              <a:spcAft>
-                <a:spcPts val="540"/>
-              </a:spcAft>
-            </a:pPr>
-            <a:r>
-              <a:rPr sz="1500">
-                <a:solidFill>
-                  <a:srgbClr val="555555"/>
-                </a:solidFill>
-                <a:latin typeface="Calibri"/>
-              </a:rPr>
-              <a:t>  -  Repair Mode uses a strict repair-engine persona</a:t>
-            </a:r>
-          </a:p>
-          <a:p>
-            <a:pPr algn="l">
-              <a:spcAft>
-                <a:spcPts val="540"/>
-              </a:spcAft>
-            </a:pPr>
-            <a:r>
-              <a:rPr sz="1800">
-                <a:solidFill>
-                  <a:srgbClr val="202020"/>
-                </a:solidFill>
-                <a:latin typeface="Calibri"/>
-              </a:rPr>
-              <a:t>•  Temperature set low (0.2) for repair so output is predictable</a:t>
-            </a:r>
-          </a:p>
-          <a:p>
-            <a:pPr algn="l">
-              <a:spcAft>
-                <a:spcPts val="540"/>
-              </a:spcAft>
-            </a:pPr>
-            <a:r>
-              <a:rPr sz="1800">
-                <a:solidFill>
-                  <a:srgbClr val="202020"/>
-                </a:solidFill>
-                <a:latin typeface="Calibri"/>
-              </a:rPr>
-              <a:t>•  All processing stays inside Deutsche Bank's Gemini tenant</a:t>
+              <a:t>•  It is a suggestion engine  -  not a decision maker</a:t>
             </a:r>
           </a:p>
         </p:txBody>
@@ -4958,7 +4708,7 @@
                   <a:srgbClr val="555555"/>
                 </a:solidFill>
               </a:rPr>
-              <a:t>4 / 12</a:t>
+              <a:t>4 / 11</a:t>
             </a:r>
           </a:p>
         </p:txBody>
@@ -5010,7 +4760,7 @@
                 </a:solidFill>
                 <a:latin typeface="Calibri"/>
               </a:rPr>
-              <a:t>Why This Helps Payment Operators</a:t>
+              <a:t>How a Repair Works  -  Three Steps</a:t>
             </a:r>
           </a:p>
         </p:txBody>
@@ -5061,14 +4811,104 @@
       </p:sp>
       <p:sp>
         <p:nvSpPr>
-          <p:cNvPr id="4" name="TextBox 3"/>
+          <p:cNvPr id="4" name="Rectangle 3"/>
+          <p:cNvSpPr/>
+          <p:nvPr/>
+        </p:nvSpPr>
+        <p:spPr>
+          <a:xfrm>
+            <a:off x="548640" y="2011680"/>
+            <a:ext cx="3566160" cy="2926080"/>
+          </a:xfrm>
+          <a:prstGeom prst="rect">
+            <a:avLst/>
+          </a:prstGeom>
+          <a:solidFill>
+            <a:srgbClr val="F4F6FB"/>
+          </a:solidFill>
+          <a:ln w="9525">
+            <a:solidFill>
+              <a:srgbClr val="CCCCCC"/>
+            </a:solidFill>
+          </a:ln>
+          <a:effectLst/>
+        </p:spPr>
+        <p:style>
+          <a:lnRef idx="1">
+            <a:schemeClr val="accent1"/>
+          </a:lnRef>
+          <a:fillRef idx="3">
+            <a:schemeClr val="accent1"/>
+          </a:fillRef>
+          <a:effectRef idx="2">
+            <a:schemeClr val="accent1"/>
+          </a:effectRef>
+          <a:fontRef idx="minor">
+            <a:schemeClr val="lt1"/>
+          </a:fontRef>
+        </p:style>
+        <p:txBody>
+          <a:bodyPr rtlCol="0" anchor="ctr"/>
+          <a:lstStyle/>
+          <a:p>
+            <a:pPr algn="ctr"/>
+          </a:p>
+        </p:txBody>
+      </p:sp>
+      <p:sp>
+        <p:nvSpPr>
+          <p:cNvPr id="5" name="Rectangle 4"/>
+          <p:cNvSpPr/>
+          <p:nvPr/>
+        </p:nvSpPr>
+        <p:spPr>
+          <a:xfrm>
+            <a:off x="548640" y="2011680"/>
+            <a:ext cx="3566160" cy="50800"/>
+          </a:xfrm>
+          <a:prstGeom prst="rect">
+            <a:avLst/>
+          </a:prstGeom>
+          <a:solidFill>
+            <a:srgbClr val="00A8E1"/>
+          </a:solidFill>
+          <a:ln>
+            <a:noFill/>
+          </a:ln>
+          <a:effectLst/>
+        </p:spPr>
+        <p:style>
+          <a:lnRef idx="1">
+            <a:schemeClr val="accent1"/>
+          </a:lnRef>
+          <a:fillRef idx="3">
+            <a:schemeClr val="accent1"/>
+          </a:fillRef>
+          <a:effectRef idx="2">
+            <a:schemeClr val="accent1"/>
+          </a:effectRef>
+          <a:fontRef idx="minor">
+            <a:schemeClr val="lt1"/>
+          </a:fontRef>
+        </p:style>
+        <p:txBody>
+          <a:bodyPr rtlCol="0" anchor="ctr"/>
+          <a:lstStyle/>
+          <a:p>
+            <a:pPr algn="ctr"/>
+          </a:p>
+        </p:txBody>
+      </p:sp>
+      <p:sp>
+        <p:nvSpPr>
+          <p:cNvPr id="6" name="TextBox 5"/>
           <p:cNvSpPr txBox="1"/>
           <p:nvPr/>
         </p:nvSpPr>
         <p:spPr>
           <a:xfrm>
-            <a:off x="731520" y="1645920"/>
-            <a:ext cx="10789920" cy="4754880"/>
+            <a:off x="822960" y="2240280"/>
+            <a:ext cx="731520" cy="548640"/>
           </a:xfrm>
           <a:prstGeom prst="rect">
             <a:avLst/>
@@ -5076,150 +4916,33 @@
           <a:noFill/>
         </p:spPr>
         <p:txBody>
-          <a:bodyPr wrap="square">
+          <a:bodyPr wrap="none">
             <a:spAutoFit/>
           </a:bodyPr>
           <a:lstStyle/>
           <a:p>
-            <a:pPr algn="l">
-              <a:spcAft>
-                <a:spcPts val="810"/>
-              </a:spcAft>
-            </a:pPr>
-            <a:r>
-              <a:rPr sz="2000">
-                <a:solidFill>
-                  <a:srgbClr val="202020"/>
-                </a:solidFill>
-                <a:latin typeface="Calibri"/>
-              </a:rPr>
-              <a:t>•  Today, fatal payments are repaired manually  -  slow and SLA-critical</a:t>
-            </a:r>
-          </a:p>
-          <a:p>
-            <a:pPr algn="l">
-              <a:spcAft>
-                <a:spcPts val="810"/>
-              </a:spcAft>
-            </a:pPr>
-            <a:r>
-              <a:rPr sz="2000">
-                <a:solidFill>
-                  <a:srgbClr val="202020"/>
-                </a:solidFill>
-                <a:latin typeface="Calibri"/>
-              </a:rPr>
-              <a:t>•  The tool gives operators a head start on every repair:</a:t>
-            </a:r>
-          </a:p>
-          <a:p>
-            <a:pPr algn="l" lvl="1">
-              <a:spcAft>
-                <a:spcPts val="810"/>
-              </a:spcAft>
-            </a:pPr>
-            <a:r>
-              <a:rPr sz="1700">
-                <a:solidFill>
-                  <a:srgbClr val="555555"/>
-                </a:solidFill>
-                <a:latin typeface="Calibri"/>
-              </a:rPr>
-              <a:t>  -  Suggests the fix instantly instead of hunting through XML</a:t>
-            </a:r>
-          </a:p>
-          <a:p>
-            <a:pPr algn="l" lvl="1">
-              <a:spcAft>
-                <a:spcPts val="810"/>
-              </a:spcAft>
-            </a:pPr>
-            <a:r>
-              <a:rPr sz="1700">
-                <a:solidFill>
-                  <a:srgbClr val="555555"/>
-                </a:solidFill>
-                <a:latin typeface="Calibri"/>
-              </a:rPr>
-              <a:t>  -  Shows a clear before/after diff so the operator can verify</a:t>
-            </a:r>
-          </a:p>
-          <a:p>
-            <a:pPr algn="l" lvl="1">
-              <a:spcAft>
-                <a:spcPts val="810"/>
-              </a:spcAft>
-            </a:pPr>
-            <a:r>
-              <a:rPr sz="1700">
-                <a:solidFill>
-                  <a:srgbClr val="555555"/>
-                </a:solidFill>
-                <a:latin typeface="Calibri"/>
-              </a:rPr>
-              <a:t>  -  Explains WHY a change was made, in plain payments language</a:t>
-            </a:r>
-          </a:p>
-          <a:p>
-            <a:pPr algn="l">
-              <a:spcAft>
-                <a:spcPts val="810"/>
-              </a:spcAft>
-            </a:pPr>
-            <a:r>
-              <a:rPr sz="2000">
-                <a:solidFill>
-                  <a:srgbClr val="202020"/>
-                </a:solidFill>
-                <a:latin typeface="Calibri"/>
-              </a:rPr>
-              <a:t>•  Less time per repair = fewer SLA misses, less rework</a:t>
-            </a:r>
-          </a:p>
-          <a:p>
-            <a:pPr algn="l">
-              <a:spcAft>
-                <a:spcPts val="810"/>
-              </a:spcAft>
-            </a:pPr>
-            <a:r>
-              <a:rPr sz="2000">
-                <a:solidFill>
-                  <a:srgbClr val="202020"/>
-                </a:solidFill>
-                <a:latin typeface="Calibri"/>
-              </a:rPr>
-              <a:t>•  Acts as a knowledge tool  -  juniors learn from the AI's reasoning</a:t>
-            </a:r>
-          </a:p>
-          <a:p>
-            <a:pPr algn="l">
-              <a:spcAft>
-                <a:spcPts val="810"/>
-              </a:spcAft>
-            </a:pPr>
-            <a:r>
-              <a:rPr sz="2000">
-                <a:solidFill>
-                  <a:srgbClr val="202020"/>
-                </a:solidFill>
-                <a:latin typeface="Calibri"/>
-              </a:rPr>
-              <a:t>•  Operator stays in control  -  the AI suggests, the human approves</a:t>
-            </a:r>
-          </a:p>
-        </p:txBody>
-      </p:sp>
-      <p:sp>
-        <p:nvSpPr>
-          <p:cNvPr id="5" name="TextBox 4"/>
+            <a:r>
+              <a:rPr sz="2800" b="1">
+                <a:solidFill>
+                  <a:srgbClr val="00A8E1"/>
+                </a:solidFill>
+                <a:latin typeface="Calibri"/>
+              </a:rPr>
+              <a:t>01</a:t>
+            </a:r>
+          </a:p>
+        </p:txBody>
+      </p:sp>
+      <p:sp>
+        <p:nvSpPr>
+          <p:cNvPr id="7" name="TextBox 6"/>
           <p:cNvSpPr txBox="1"/>
           <p:nvPr/>
         </p:nvSpPr>
         <p:spPr>
           <a:xfrm>
-            <a:off x="11155680" y="6446520"/>
-            <a:ext cx="914400" cy="274320"/>
+            <a:off x="1554480" y="2304288"/>
+            <a:ext cx="2377440" cy="548640"/>
           </a:xfrm>
           <a:prstGeom prst="rect">
             <a:avLst/>
@@ -5232,6 +4955,493 @@
           </a:bodyPr>
           <a:lstStyle/>
           <a:p>
+            <a:r>
+              <a:rPr sz="1800" b="1">
+                <a:solidFill>
+                  <a:srgbClr val="1E2978"/>
+                </a:solidFill>
+                <a:latin typeface="Calibri"/>
+              </a:rPr>
+              <a:t>Normalize</a:t>
+            </a:r>
+          </a:p>
+        </p:txBody>
+      </p:sp>
+      <p:sp>
+        <p:nvSpPr>
+          <p:cNvPr id="8" name="TextBox 7"/>
+          <p:cNvSpPr txBox="1"/>
+          <p:nvPr/>
+        </p:nvSpPr>
+        <p:spPr>
+          <a:xfrm>
+            <a:off x="822960" y="3108960"/>
+            <a:ext cx="3017520" cy="1737360"/>
+          </a:xfrm>
+          <a:prstGeom prst="rect">
+            <a:avLst/>
+          </a:prstGeom>
+          <a:noFill/>
+        </p:spPr>
+        <p:txBody>
+          <a:bodyPr wrap="square">
+            <a:spAutoFit/>
+          </a:bodyPr>
+          <a:lstStyle/>
+          <a:p>
+            <a:r>
+              <a:rPr sz="1400">
+                <a:solidFill>
+                  <a:srgbClr val="202020"/>
+                </a:solidFill>
+                <a:latin typeface="Calibri"/>
+              </a:rPr>
+              <a:t>AI tidies up the message formatting first  -  consistent indentation, one element per line  -  without changing any content. This makes the diff honest.</a:t>
+            </a:r>
+          </a:p>
+        </p:txBody>
+      </p:sp>
+      <p:sp>
+        <p:nvSpPr>
+          <p:cNvPr id="9" name="Rectangle 8"/>
+          <p:cNvSpPr/>
+          <p:nvPr/>
+        </p:nvSpPr>
+        <p:spPr>
+          <a:xfrm>
+            <a:off x="4434840" y="2011680"/>
+            <a:ext cx="3566160" cy="2926080"/>
+          </a:xfrm>
+          <a:prstGeom prst="rect">
+            <a:avLst/>
+          </a:prstGeom>
+          <a:solidFill>
+            <a:srgbClr val="F4F6FB"/>
+          </a:solidFill>
+          <a:ln w="9525">
+            <a:solidFill>
+              <a:srgbClr val="CCCCCC"/>
+            </a:solidFill>
+          </a:ln>
+          <a:effectLst/>
+        </p:spPr>
+        <p:style>
+          <a:lnRef idx="1">
+            <a:schemeClr val="accent1"/>
+          </a:lnRef>
+          <a:fillRef idx="3">
+            <a:schemeClr val="accent1"/>
+          </a:fillRef>
+          <a:effectRef idx="2">
+            <a:schemeClr val="accent1"/>
+          </a:effectRef>
+          <a:fontRef idx="minor">
+            <a:schemeClr val="lt1"/>
+          </a:fontRef>
+        </p:style>
+        <p:txBody>
+          <a:bodyPr rtlCol="0" anchor="ctr"/>
+          <a:lstStyle/>
+          <a:p>
+            <a:pPr algn="ctr"/>
+          </a:p>
+        </p:txBody>
+      </p:sp>
+      <p:sp>
+        <p:nvSpPr>
+          <p:cNvPr id="10" name="Rectangle 9"/>
+          <p:cNvSpPr/>
+          <p:nvPr/>
+        </p:nvSpPr>
+        <p:spPr>
+          <a:xfrm>
+            <a:off x="4434840" y="2011680"/>
+            <a:ext cx="3566160" cy="50800"/>
+          </a:xfrm>
+          <a:prstGeom prst="rect">
+            <a:avLst/>
+          </a:prstGeom>
+          <a:solidFill>
+            <a:srgbClr val="1E2978"/>
+          </a:solidFill>
+          <a:ln>
+            <a:noFill/>
+          </a:ln>
+          <a:effectLst/>
+        </p:spPr>
+        <p:style>
+          <a:lnRef idx="1">
+            <a:schemeClr val="accent1"/>
+          </a:lnRef>
+          <a:fillRef idx="3">
+            <a:schemeClr val="accent1"/>
+          </a:fillRef>
+          <a:effectRef idx="2">
+            <a:schemeClr val="accent1"/>
+          </a:effectRef>
+          <a:fontRef idx="minor">
+            <a:schemeClr val="lt1"/>
+          </a:fontRef>
+        </p:style>
+        <p:txBody>
+          <a:bodyPr rtlCol="0" anchor="ctr"/>
+          <a:lstStyle/>
+          <a:p>
+            <a:pPr algn="ctr"/>
+          </a:p>
+        </p:txBody>
+      </p:sp>
+      <p:sp>
+        <p:nvSpPr>
+          <p:cNvPr id="11" name="TextBox 10"/>
+          <p:cNvSpPr txBox="1"/>
+          <p:nvPr/>
+        </p:nvSpPr>
+        <p:spPr>
+          <a:xfrm>
+            <a:off x="4709160" y="2240280"/>
+            <a:ext cx="731520" cy="548640"/>
+          </a:xfrm>
+          <a:prstGeom prst="rect">
+            <a:avLst/>
+          </a:prstGeom>
+          <a:noFill/>
+        </p:spPr>
+        <p:txBody>
+          <a:bodyPr wrap="none">
+            <a:spAutoFit/>
+          </a:bodyPr>
+          <a:lstStyle/>
+          <a:p>
+            <a:r>
+              <a:rPr sz="2800" b="1">
+                <a:solidFill>
+                  <a:srgbClr val="1E2978"/>
+                </a:solidFill>
+                <a:latin typeface="Calibri"/>
+              </a:rPr>
+              <a:t>02</a:t>
+            </a:r>
+          </a:p>
+        </p:txBody>
+      </p:sp>
+      <p:sp>
+        <p:nvSpPr>
+          <p:cNvPr id="12" name="TextBox 11"/>
+          <p:cNvSpPr txBox="1"/>
+          <p:nvPr/>
+        </p:nvSpPr>
+        <p:spPr>
+          <a:xfrm>
+            <a:off x="5440680" y="2304288"/>
+            <a:ext cx="2377440" cy="548640"/>
+          </a:xfrm>
+          <a:prstGeom prst="rect">
+            <a:avLst/>
+          </a:prstGeom>
+          <a:noFill/>
+        </p:spPr>
+        <p:txBody>
+          <a:bodyPr wrap="none">
+            <a:spAutoFit/>
+          </a:bodyPr>
+          <a:lstStyle/>
+          <a:p>
+            <a:r>
+              <a:rPr sz="1800" b="1">
+                <a:solidFill>
+                  <a:srgbClr val="1E2978"/>
+                </a:solidFill>
+                <a:latin typeface="Calibri"/>
+              </a:rPr>
+              <a:t>Repair</a:t>
+            </a:r>
+          </a:p>
+        </p:txBody>
+      </p:sp>
+      <p:sp>
+        <p:nvSpPr>
+          <p:cNvPr id="13" name="TextBox 12"/>
+          <p:cNvSpPr txBox="1"/>
+          <p:nvPr/>
+        </p:nvSpPr>
+        <p:spPr>
+          <a:xfrm>
+            <a:off x="4709160" y="3108960"/>
+            <a:ext cx="3017520" cy="1737360"/>
+          </a:xfrm>
+          <a:prstGeom prst="rect">
+            <a:avLst/>
+          </a:prstGeom>
+          <a:noFill/>
+        </p:spPr>
+        <p:txBody>
+          <a:bodyPr wrap="square">
+            <a:spAutoFit/>
+          </a:bodyPr>
+          <a:lstStyle/>
+          <a:p>
+            <a:r>
+              <a:rPr sz="1400">
+                <a:solidFill>
+                  <a:srgbClr val="202020"/>
+                </a:solidFill>
+                <a:latin typeface="Calibri"/>
+              </a:rPr>
+              <a:t>AI returns the corrected payment message. Asked to make the minimum changes required and to preserve everything else.</a:t>
+            </a:r>
+          </a:p>
+        </p:txBody>
+      </p:sp>
+      <p:sp>
+        <p:nvSpPr>
+          <p:cNvPr id="14" name="Rectangle 13"/>
+          <p:cNvSpPr/>
+          <p:nvPr/>
+        </p:nvSpPr>
+        <p:spPr>
+          <a:xfrm>
+            <a:off x="8321040" y="2011680"/>
+            <a:ext cx="3566160" cy="2926080"/>
+          </a:xfrm>
+          <a:prstGeom prst="rect">
+            <a:avLst/>
+          </a:prstGeom>
+          <a:solidFill>
+            <a:srgbClr val="F4F6FB"/>
+          </a:solidFill>
+          <a:ln w="9525">
+            <a:solidFill>
+              <a:srgbClr val="CCCCCC"/>
+            </a:solidFill>
+          </a:ln>
+          <a:effectLst/>
+        </p:spPr>
+        <p:style>
+          <a:lnRef idx="1">
+            <a:schemeClr val="accent1"/>
+          </a:lnRef>
+          <a:fillRef idx="3">
+            <a:schemeClr val="accent1"/>
+          </a:fillRef>
+          <a:effectRef idx="2">
+            <a:schemeClr val="accent1"/>
+          </a:effectRef>
+          <a:fontRef idx="minor">
+            <a:schemeClr val="lt1"/>
+          </a:fontRef>
+        </p:style>
+        <p:txBody>
+          <a:bodyPr rtlCol="0" anchor="ctr"/>
+          <a:lstStyle/>
+          <a:p>
+            <a:pPr algn="ctr"/>
+          </a:p>
+        </p:txBody>
+      </p:sp>
+      <p:sp>
+        <p:nvSpPr>
+          <p:cNvPr id="15" name="Rectangle 14"/>
+          <p:cNvSpPr/>
+          <p:nvPr/>
+        </p:nvSpPr>
+        <p:spPr>
+          <a:xfrm>
+            <a:off x="8321040" y="2011680"/>
+            <a:ext cx="3566160" cy="50800"/>
+          </a:xfrm>
+          <a:prstGeom prst="rect">
+            <a:avLst/>
+          </a:prstGeom>
+          <a:solidFill>
+            <a:srgbClr val="2F9E44"/>
+          </a:solidFill>
+          <a:ln>
+            <a:noFill/>
+          </a:ln>
+          <a:effectLst/>
+        </p:spPr>
+        <p:style>
+          <a:lnRef idx="1">
+            <a:schemeClr val="accent1"/>
+          </a:lnRef>
+          <a:fillRef idx="3">
+            <a:schemeClr val="accent1"/>
+          </a:fillRef>
+          <a:effectRef idx="2">
+            <a:schemeClr val="accent1"/>
+          </a:effectRef>
+          <a:fontRef idx="minor">
+            <a:schemeClr val="lt1"/>
+          </a:fontRef>
+        </p:style>
+        <p:txBody>
+          <a:bodyPr rtlCol="0" anchor="ctr"/>
+          <a:lstStyle/>
+          <a:p>
+            <a:pPr algn="ctr"/>
+          </a:p>
+        </p:txBody>
+      </p:sp>
+      <p:sp>
+        <p:nvSpPr>
+          <p:cNvPr id="16" name="TextBox 15"/>
+          <p:cNvSpPr txBox="1"/>
+          <p:nvPr/>
+        </p:nvSpPr>
+        <p:spPr>
+          <a:xfrm>
+            <a:off x="8595360" y="2240280"/>
+            <a:ext cx="731520" cy="548640"/>
+          </a:xfrm>
+          <a:prstGeom prst="rect">
+            <a:avLst/>
+          </a:prstGeom>
+          <a:noFill/>
+        </p:spPr>
+        <p:txBody>
+          <a:bodyPr wrap="none">
+            <a:spAutoFit/>
+          </a:bodyPr>
+          <a:lstStyle/>
+          <a:p>
+            <a:r>
+              <a:rPr sz="2800" b="1">
+                <a:solidFill>
+                  <a:srgbClr val="2F9E44"/>
+                </a:solidFill>
+                <a:latin typeface="Calibri"/>
+              </a:rPr>
+              <a:t>03</a:t>
+            </a:r>
+          </a:p>
+        </p:txBody>
+      </p:sp>
+      <p:sp>
+        <p:nvSpPr>
+          <p:cNvPr id="17" name="TextBox 16"/>
+          <p:cNvSpPr txBox="1"/>
+          <p:nvPr/>
+        </p:nvSpPr>
+        <p:spPr>
+          <a:xfrm>
+            <a:off x="9326880" y="2304288"/>
+            <a:ext cx="2377440" cy="548640"/>
+          </a:xfrm>
+          <a:prstGeom prst="rect">
+            <a:avLst/>
+          </a:prstGeom>
+          <a:noFill/>
+        </p:spPr>
+        <p:txBody>
+          <a:bodyPr wrap="none">
+            <a:spAutoFit/>
+          </a:bodyPr>
+          <a:lstStyle/>
+          <a:p>
+            <a:r>
+              <a:rPr sz="1800" b="1">
+                <a:solidFill>
+                  <a:srgbClr val="1E2978"/>
+                </a:solidFill>
+                <a:latin typeface="Calibri"/>
+              </a:rPr>
+              <a:t>Verify</a:t>
+            </a:r>
+          </a:p>
+        </p:txBody>
+      </p:sp>
+      <p:sp>
+        <p:nvSpPr>
+          <p:cNvPr id="18" name="TextBox 17"/>
+          <p:cNvSpPr txBox="1"/>
+          <p:nvPr/>
+        </p:nvSpPr>
+        <p:spPr>
+          <a:xfrm>
+            <a:off x="8595360" y="3108960"/>
+            <a:ext cx="3017520" cy="1737360"/>
+          </a:xfrm>
+          <a:prstGeom prst="rect">
+            <a:avLst/>
+          </a:prstGeom>
+          <a:noFill/>
+        </p:spPr>
+        <p:txBody>
+          <a:bodyPr wrap="square">
+            <a:spAutoFit/>
+          </a:bodyPr>
+          <a:lstStyle/>
+          <a:p>
+            <a:r>
+              <a:rPr sz="1400">
+                <a:solidFill>
+                  <a:srgbClr val="202020"/>
+                </a:solidFill>
+                <a:latin typeface="Calibri"/>
+              </a:rPr>
+              <a:t>The operator sees a red / green diff and decides. Optional Four Eye Check runs a second independent AI pass with a confidence score.</a:t>
+            </a:r>
+          </a:p>
+        </p:txBody>
+      </p:sp>
+      <p:sp>
+        <p:nvSpPr>
+          <p:cNvPr id="19" name="TextBox 18"/>
+          <p:cNvSpPr txBox="1"/>
+          <p:nvPr/>
+        </p:nvSpPr>
+        <p:spPr>
+          <a:xfrm>
+            <a:off x="548640" y="5212080"/>
+            <a:ext cx="11064240" cy="365760"/>
+          </a:xfrm>
+          <a:prstGeom prst="rect">
+            <a:avLst/>
+          </a:prstGeom>
+          <a:noFill/>
+        </p:spPr>
+        <p:txBody>
+          <a:bodyPr wrap="none">
+            <a:spAutoFit/>
+          </a:bodyPr>
+          <a:lstStyle/>
+          <a:p>
+            <a:pPr algn="ctr"/>
+            <a:r>
+              <a:rPr sz="1400" i="1">
+                <a:solidFill>
+                  <a:srgbClr val="202020"/>
+                </a:solidFill>
+                <a:latin typeface="Calibri"/>
+              </a:rPr>
+              <a:t>The operator is always the final approver  -  the AI suggests, the human decides.</a:t>
+            </a:r>
+          </a:p>
+        </p:txBody>
+      </p:sp>
+      <p:sp>
+        <p:nvSpPr>
+          <p:cNvPr id="20" name="TextBox 19"/>
+          <p:cNvSpPr txBox="1"/>
+          <p:nvPr/>
+        </p:nvSpPr>
+        <p:spPr>
+          <a:xfrm>
+            <a:off x="11155680" y="6446520"/>
+            <a:ext cx="914400" cy="274320"/>
+          </a:xfrm>
+          <a:prstGeom prst="rect">
+            <a:avLst/>
+          </a:prstGeom>
+          <a:noFill/>
+        </p:spPr>
+        <p:txBody>
+          <a:bodyPr wrap="none">
+            <a:spAutoFit/>
+          </a:bodyPr>
+          <a:lstStyle/>
+          <a:p>
             <a:pPr algn="r"/>
             <a:r>
               <a:rPr sz="1000">
@@ -5239,7 +5449,7 @@
                   <a:srgbClr val="555555"/>
                 </a:solidFill>
               </a:rPr>
-              <a:t>5 / 12</a:t>
+              <a:t>5 / 11</a:t>
             </a:r>
           </a:p>
         </p:txBody>
@@ -5270,8 +5480,8 @@
         </p:nvSpPr>
         <p:spPr>
           <a:xfrm>
-            <a:off x="548640" y="365760"/>
-            <a:ext cx="11064240" cy="822960"/>
+            <a:off x="548640" y="2560320"/>
+            <a:ext cx="11064240" cy="914400"/>
           </a:xfrm>
           <a:prstGeom prst="rect">
             <a:avLst/>
@@ -5279,39 +5489,110 @@
           <a:noFill/>
         </p:spPr>
         <p:txBody>
-          <a:bodyPr wrap="square">
+          <a:bodyPr wrap="none">
             <a:spAutoFit/>
           </a:bodyPr>
           <a:lstStyle/>
           <a:p>
-            <a:r>
-              <a:rPr sz="3600" b="1">
+            <a:pPr algn="ctr"/>
+            <a:r>
+              <a:rPr sz="6400" b="1">
                 <a:solidFill>
                   <a:srgbClr val="1E2978"/>
                 </a:solidFill>
                 <a:latin typeface="Calibri"/>
               </a:rPr>
-              <a:t>Example  -  Loading a Broken Payment</a:t>
-            </a:r>
-          </a:p>
-        </p:txBody>
-      </p:sp>
-      <p:sp>
-        <p:nvSpPr>
-          <p:cNvPr id="3" name="Rectangle 2"/>
+              <a:t>LIVE DEMO</a:t>
+            </a:r>
+          </a:p>
+        </p:txBody>
+      </p:sp>
+      <p:sp>
+        <p:nvSpPr>
+          <p:cNvPr id="3" name="TextBox 2"/>
+          <p:cNvSpPr txBox="1"/>
+          <p:nvPr/>
+        </p:nvSpPr>
+        <p:spPr>
+          <a:xfrm>
+            <a:off x="548640" y="3657600"/>
+            <a:ext cx="11064240" cy="640080"/>
+          </a:xfrm>
+          <a:prstGeom prst="rect">
+            <a:avLst/>
+          </a:prstGeom>
+          <a:noFill/>
+        </p:spPr>
+        <p:txBody>
+          <a:bodyPr wrap="none">
+            <a:spAutoFit/>
+          </a:bodyPr>
+          <a:lstStyle/>
+          <a:p>
+            <a:pPr algn="ctr"/>
+            <a:r>
+              <a:rPr sz="2400">
+                <a:solidFill>
+                  <a:srgbClr val="202020"/>
+                </a:solidFill>
+                <a:latin typeface="Calibri"/>
+              </a:rPr>
+              <a:t>Five real fatal-payment scenarios</a:t>
+            </a:r>
+          </a:p>
+        </p:txBody>
+      </p:sp>
+      <p:sp>
+        <p:nvSpPr>
+          <p:cNvPr id="4" name="TextBox 3"/>
+          <p:cNvSpPr txBox="1"/>
+          <p:nvPr/>
+        </p:nvSpPr>
+        <p:spPr>
+          <a:xfrm>
+            <a:off x="548640" y="4206240"/>
+            <a:ext cx="11064240" cy="548640"/>
+          </a:xfrm>
+          <a:prstGeom prst="rect">
+            <a:avLst/>
+          </a:prstGeom>
+          <a:noFill/>
+        </p:spPr>
+        <p:txBody>
+          <a:bodyPr wrap="none">
+            <a:spAutoFit/>
+          </a:bodyPr>
+          <a:lstStyle/>
+          <a:p>
+            <a:pPr algn="ctr"/>
+            <a:r>
+              <a:rPr sz="1600" i="1">
+                <a:solidFill>
+                  <a:srgbClr val="555555"/>
+                </a:solidFill>
+                <a:latin typeface="Calibri"/>
+              </a:rPr>
+              <a:t>Currency code  |  BIC code  |  Charge bearer  |  Multi-issue  |  Country code</a:t>
+            </a:r>
+          </a:p>
+        </p:txBody>
+      </p:sp>
+      <p:sp>
+        <p:nvSpPr>
+          <p:cNvPr id="5" name="Rectangle 4"/>
           <p:cNvSpPr/>
           <p:nvPr/>
         </p:nvSpPr>
         <p:spPr>
           <a:xfrm>
-            <a:off x="548640" y="1234440"/>
-            <a:ext cx="2286000" cy="38100"/>
+            <a:off x="4937760" y="3520440"/>
+            <a:ext cx="2286000" cy="50800"/>
           </a:xfrm>
           <a:prstGeom prst="rect">
             <a:avLst/>
           </a:prstGeom>
           <a:solidFill>
-            <a:srgbClr val="1E2978"/>
+            <a:srgbClr val="3B5BDB"/>
           </a:solidFill>
           <a:ln>
             <a:noFill/>
@@ -5340,45 +5621,16 @@
           </a:p>
         </p:txBody>
       </p:sp>
-      <p:pic>
-        <p:nvPicPr>
-          <p:cNvPr id="4" name="Picture 3" descr="02_repair_mode.png"/>
-          <p:cNvPicPr>
-            <a:picLocks noChangeAspect="1"/>
-          </p:cNvPicPr>
-          <p:nvPr/>
-        </p:nvPicPr>
-        <p:blipFill>
-          <a:blip r:embed="rId2"/>
-          <a:stretch>
-            <a:fillRect/>
-          </a:stretch>
-        </p:blipFill>
-        <p:spPr>
-          <a:xfrm>
-            <a:off x="2524760" y="1554480"/>
-            <a:ext cx="7112000" cy="4572000"/>
-          </a:xfrm>
-          <a:prstGeom prst="rect">
-            <a:avLst/>
-          </a:prstGeom>
-          <a:ln w="9525">
-            <a:solidFill>
-              <a:srgbClr val="CCCCCC"/>
-            </a:solidFill>
-          </a:ln>
-        </p:spPr>
-      </p:pic>
-      <p:sp>
-        <p:nvSpPr>
-          <p:cNvPr id="5" name="TextBox 4"/>
+      <p:sp>
+        <p:nvSpPr>
+          <p:cNvPr id="6" name="TextBox 5"/>
           <p:cNvSpPr txBox="1"/>
           <p:nvPr/>
         </p:nvSpPr>
         <p:spPr>
           <a:xfrm>
-            <a:off x="548640" y="6172200"/>
-            <a:ext cx="11064240" cy="365760"/>
+            <a:off x="11155680" y="6446520"/>
+            <a:ext cx="914400" cy="274320"/>
           </a:xfrm>
           <a:prstGeom prst="rect">
             <a:avLst/>
@@ -5391,49 +5643,14 @@
           </a:bodyPr>
           <a:lstStyle/>
           <a:p>
-            <a:pPr algn="ctr"/>
-            <a:r>
-              <a:rPr sz="1200" i="1">
+            <a:pPr algn="r"/>
+            <a:r>
+              <a:rPr sz="1000">
                 <a:solidFill>
                   <a:srgbClr val="555555"/>
                 </a:solidFill>
-                <a:latin typeface="Calibri"/>
-              </a:rPr>
-              <a:t>Repair Mode  -  PACS.008 payment pasted in.  Note the invalid currency code Ccy="EU" in the XML.</a:t>
-            </a:r>
-          </a:p>
-        </p:txBody>
-      </p:sp>
-      <p:sp>
-        <p:nvSpPr>
-          <p:cNvPr id="6" name="TextBox 5"/>
-          <p:cNvSpPr txBox="1"/>
-          <p:nvPr/>
-        </p:nvSpPr>
-        <p:spPr>
-          <a:xfrm>
-            <a:off x="11155680" y="6446520"/>
-            <a:ext cx="914400" cy="274320"/>
-          </a:xfrm>
-          <a:prstGeom prst="rect">
-            <a:avLst/>
-          </a:prstGeom>
-          <a:noFill/>
-        </p:spPr>
-        <p:txBody>
-          <a:bodyPr wrap="none">
-            <a:spAutoFit/>
-          </a:bodyPr>
-          <a:lstStyle/>
-          <a:p>
-            <a:pPr algn="r"/>
-            <a:r>
-              <a:rPr sz="1000">
-                <a:solidFill>
-                  <a:srgbClr val="555555"/>
-                </a:solidFill>
-              </a:rPr>
-              <a:t>6 / 12</a:t>
+              </a:rPr>
+              <a:t>6 / 11</a:t>
             </a:r>
           </a:p>
         </p:txBody>
@@ -5485,7 +5702,7 @@
                 </a:solidFill>
                 <a:latin typeface="Calibri"/>
               </a:rPr>
-              <a:t>Example  -  AI Repair Result (Diff View)</a:t>
+              <a:t>Beyond the Repair  -  Two Extra Controls</a:t>
             </a:r>
           </a:p>
         </p:txBody>
@@ -5534,9 +5751,160 @@
           </a:p>
         </p:txBody>
       </p:sp>
+      <p:sp>
+        <p:nvSpPr>
+          <p:cNvPr id="4" name="TextBox 3"/>
+          <p:cNvSpPr txBox="1"/>
+          <p:nvPr/>
+        </p:nvSpPr>
+        <p:spPr>
+          <a:xfrm>
+            <a:off x="548640" y="1645920"/>
+            <a:ext cx="5943600" cy="4754880"/>
+          </a:xfrm>
+          <a:prstGeom prst="rect">
+            <a:avLst/>
+          </a:prstGeom>
+          <a:noFill/>
+        </p:spPr>
+        <p:txBody>
+          <a:bodyPr wrap="square">
+            <a:spAutoFit/>
+          </a:bodyPr>
+          <a:lstStyle/>
+          <a:p>
+            <a:pPr algn="l">
+              <a:spcAft>
+                <a:spcPts val="504"/>
+              </a:spcAft>
+            </a:pPr>
+            <a:r>
+              <a:rPr sz="1500">
+                <a:solidFill>
+                  <a:srgbClr val="202020"/>
+                </a:solidFill>
+                <a:latin typeface="Calibri"/>
+              </a:rPr>
+              <a:t>•  Four Eye Check  -  an independent AI second pass:</a:t>
+            </a:r>
+          </a:p>
+          <a:p>
+            <a:pPr algn="l" lvl="1">
+              <a:spcAft>
+                <a:spcPts val="504"/>
+              </a:spcAft>
+            </a:pPr>
+            <a:r>
+              <a:rPr sz="1200">
+                <a:solidFill>
+                  <a:srgbClr val="555555"/>
+                </a:solidFill>
+                <a:latin typeface="Calibri"/>
+              </a:rPr>
+              <a:t>  -  Runs the repaired payment through the AI again, as a second reviewer</a:t>
+            </a:r>
+          </a:p>
+          <a:p>
+            <a:pPr algn="l" lvl="1">
+              <a:spcAft>
+                <a:spcPts val="504"/>
+              </a:spcAft>
+            </a:pPr>
+            <a:r>
+              <a:rPr sz="1200">
+                <a:solidFill>
+                  <a:srgbClr val="555555"/>
+                </a:solidFill>
+                <a:latin typeface="Calibri"/>
+              </a:rPr>
+              <a:t>  -  Returns a confidence score (0 to 100%) with a colour-coded badge</a:t>
+            </a:r>
+          </a:p>
+          <a:p>
+            <a:pPr algn="l" lvl="1">
+              <a:spcAft>
+                <a:spcPts val="504"/>
+              </a:spcAft>
+            </a:pPr>
+            <a:r>
+              <a:rPr sz="1200">
+                <a:solidFill>
+                  <a:srgbClr val="555555"/>
+                </a:solidFill>
+                <a:latin typeface="Calibri"/>
+              </a:rPr>
+              <a:t>  -  Lists any additional changes still needed</a:t>
+            </a:r>
+          </a:p>
+          <a:p>
+            <a:pPr algn="l">
+              <a:spcAft>
+                <a:spcPts val="504"/>
+              </a:spcAft>
+            </a:pPr>
+            <a:r>
+              <a:rPr sz="1500">
+                <a:solidFill>
+                  <a:srgbClr val="202020"/>
+                </a:solidFill>
+                <a:latin typeface="Calibri"/>
+              </a:rPr>
+              <a:t>•  Explain It To Me  -  AI describes the changes in plain English:</a:t>
+            </a:r>
+          </a:p>
+          <a:p>
+            <a:pPr algn="l" lvl="1">
+              <a:spcAft>
+                <a:spcPts val="504"/>
+              </a:spcAft>
+            </a:pPr>
+            <a:r>
+              <a:rPr sz="1200">
+                <a:solidFill>
+                  <a:srgbClr val="555555"/>
+                </a:solidFill>
+                <a:latin typeface="Calibri"/>
+              </a:rPr>
+              <a:t>  -  References specific fields and standards (ISO 4217, ISO 3166, etc.)</a:t>
+            </a:r>
+          </a:p>
+          <a:p>
+            <a:pPr algn="l" lvl="1">
+              <a:spcAft>
+                <a:spcPts val="504"/>
+              </a:spcAft>
+            </a:pPr>
+            <a:r>
+              <a:rPr sz="1200">
+                <a:solidFill>
+                  <a:srgbClr val="555555"/>
+                </a:solidFill>
+                <a:latin typeface="Calibri"/>
+              </a:rPr>
+              <a:t>  -  Doubles as a knowledge tool for junior operators</a:t>
+            </a:r>
+          </a:p>
+          <a:p>
+            <a:pPr algn="l">
+              <a:spcAft>
+                <a:spcPts val="504"/>
+              </a:spcAft>
+            </a:pPr>
+            <a:r>
+              <a:rPr sz="1500">
+                <a:solidFill>
+                  <a:srgbClr val="202020"/>
+                </a:solidFill>
+                <a:latin typeface="Calibri"/>
+              </a:rPr>
+              <a:t>•  Both features keep the operator informed  -  no black box</a:t>
+            </a:r>
+          </a:p>
+        </p:txBody>
+      </p:sp>
       <p:pic>
         <p:nvPicPr>
-          <p:cNvPr id="4" name="Picture 3" descr="03_diff_result.png"/>
+          <p:cNvPr id="5" name="Picture 4" descr="04_four_eye_check.png"/>
           <p:cNvPicPr>
             <a:picLocks noChangeAspect="1"/>
           </p:cNvPicPr>
@@ -5550,8 +5918,8 @@
         </p:blipFill>
         <p:spPr>
           <a:xfrm>
-            <a:off x="2524760" y="1554480"/>
-            <a:ext cx="7112000" cy="4572000"/>
+            <a:off x="6675120" y="2165169"/>
+            <a:ext cx="5212080" cy="3350622"/>
           </a:xfrm>
           <a:prstGeom prst="rect">
             <a:avLst/>
@@ -5565,14 +5933,14 @@
       </p:pic>
       <p:sp>
         <p:nvSpPr>
-          <p:cNvPr id="5" name="TextBox 4"/>
+          <p:cNvPr id="6" name="TextBox 5"/>
           <p:cNvSpPr txBox="1"/>
           <p:nvPr/>
         </p:nvSpPr>
         <p:spPr>
           <a:xfrm>
-            <a:off x="548640" y="6172200"/>
-            <a:ext cx="11064240" cy="365760"/>
+            <a:off x="6675120" y="6172200"/>
+            <a:ext cx="5212080" cy="365760"/>
           </a:xfrm>
           <a:prstGeom prst="rect">
             <a:avLst/>
@@ -5593,14 +5961,14 @@
                 </a:solidFill>
                 <a:latin typeface="Calibri"/>
               </a:rPr>
-              <a:t>Red line = original (Ccy="EU").  Green line = AI-corrected (Ccy="EUR").  Everything else is preserved unchanged.</a:t>
-            </a:r>
-          </a:p>
-        </p:txBody>
-      </p:sp>
-      <p:sp>
-        <p:nvSpPr>
-          <p:cNvPr id="6" name="TextBox 5"/>
+              <a:t>Four Eye Check result with 92% confidence badge</a:t>
+            </a:r>
+          </a:p>
+        </p:txBody>
+      </p:sp>
+      <p:sp>
+        <p:nvSpPr>
+          <p:cNvPr id="7" name="TextBox 6"/>
           <p:cNvSpPr txBox="1"/>
           <p:nvPr/>
         </p:nvSpPr>
@@ -5627,7 +5995,7 @@
                   <a:srgbClr val="555555"/>
                 </a:solidFill>
               </a:rPr>
-              <a:t>7 / 12</a:t>
+              <a:t>7 / 11</a:t>
             </a:r>
           </a:p>
         </p:txBody>
@@ -5679,7 +6047,7 @@
                 </a:solidFill>
                 <a:latin typeface="Calibri"/>
               </a:rPr>
-              <a:t>Example  -  Four Eye Check Verification</a:t>
+              <a:t>This Is an Early Proof of Concept</a:t>
             </a:r>
           </a:p>
         </p:txBody>
@@ -5728,45 +6096,16 @@
           </a:p>
         </p:txBody>
       </p:sp>
-      <p:pic>
-        <p:nvPicPr>
-          <p:cNvPr id="4" name="Picture 3" descr="04_four_eye_check.png"/>
-          <p:cNvPicPr>
-            <a:picLocks noChangeAspect="1"/>
-          </p:cNvPicPr>
-          <p:nvPr/>
-        </p:nvPicPr>
-        <p:blipFill>
-          <a:blip r:embed="rId2"/>
-          <a:stretch>
-            <a:fillRect/>
-          </a:stretch>
-        </p:blipFill>
-        <p:spPr>
-          <a:xfrm>
-            <a:off x="2524760" y="1554480"/>
-            <a:ext cx="7112000" cy="4572000"/>
-          </a:xfrm>
-          <a:prstGeom prst="rect">
-            <a:avLst/>
-          </a:prstGeom>
-          <a:ln w="9525">
-            <a:solidFill>
-              <a:srgbClr val="CCCCCC"/>
-            </a:solidFill>
-          </a:ln>
-        </p:spPr>
-      </p:pic>
-      <p:sp>
-        <p:nvSpPr>
-          <p:cNvPr id="5" name="TextBox 4"/>
+      <p:sp>
+        <p:nvSpPr>
+          <p:cNvPr id="4" name="TextBox 3"/>
           <p:cNvSpPr txBox="1"/>
           <p:nvPr/>
         </p:nvSpPr>
         <p:spPr>
           <a:xfrm>
-            <a:off x="548640" y="6172200"/>
-            <a:ext cx="11064240" cy="365760"/>
+            <a:off x="731520" y="1645920"/>
+            <a:ext cx="10789920" cy="4754880"/>
           </a:xfrm>
           <a:prstGeom prst="rect">
             <a:avLst/>
@@ -5774,27 +6113,143 @@
           <a:noFill/>
         </p:spPr>
         <p:txBody>
-          <a:bodyPr wrap="none">
+          <a:bodyPr wrap="square">
             <a:spAutoFit/>
           </a:bodyPr>
           <a:lstStyle/>
           <a:p>
-            <a:pPr algn="ctr"/>
-            <a:r>
-              <a:rPr sz="1200" i="1">
+            <a:pPr algn="l">
+              <a:spcAft>
+                <a:spcPts val="576"/>
+              </a:spcAft>
+            </a:pPr>
+            <a:r>
+              <a:rPr sz="1700">
+                <a:solidFill>
+                  <a:srgbClr val="202020"/>
+                </a:solidFill>
+                <a:latin typeface="Calibri"/>
+              </a:rPr>
+              <a:t>•  Built in a short timeframe to explore what's possible</a:t>
+            </a:r>
+          </a:p>
+          <a:p>
+            <a:pPr algn="l">
+              <a:spcAft>
+                <a:spcPts val="576"/>
+              </a:spcAft>
+            </a:pPr>
+            <a:r>
+              <a:rPr sz="1700">
+                <a:solidFill>
+                  <a:srgbClr val="202020"/>
+                </a:solidFill>
+                <a:latin typeface="Calibri"/>
+              </a:rPr>
+              <a:t>•  Was given access to the AI endpoint  -  built a thin UI on top</a:t>
+            </a:r>
+          </a:p>
+          <a:p>
+            <a:pPr algn="l">
+              <a:spcAft>
+                <a:spcPts val="576"/>
+              </a:spcAft>
+            </a:pPr>
+            <a:r>
+              <a:rPr sz="1700">
+                <a:solidFill>
+                  <a:srgbClr val="202020"/>
+                </a:solidFill>
+                <a:latin typeface="Calibri"/>
+              </a:rPr>
+              <a:t>•  What this is NOT today:</a:t>
+            </a:r>
+          </a:p>
+          <a:p>
+            <a:pPr algn="l" lvl="1">
+              <a:spcAft>
+                <a:spcPts val="576"/>
+              </a:spcAft>
+            </a:pPr>
+            <a:r>
+              <a:rPr sz="1400">
                 <a:solidFill>
                   <a:srgbClr val="555555"/>
                 </a:solidFill>
                 <a:latin typeface="Calibri"/>
               </a:rPr>
-              <a:t>An independent AI pass confirms the repair  -  92% confidence, no additional changes needed.</a:t>
-            </a:r>
-          </a:p>
-        </p:txBody>
-      </p:sp>
-      <p:sp>
-        <p:nvSpPr>
-          <p:cNvPr id="6" name="TextBox 5"/>
+              <a:t>  -  Not integrated with the live repair queue  -  operators paste messages in</a:t>
+            </a:r>
+          </a:p>
+          <a:p>
+            <a:pPr algn="l" lvl="1">
+              <a:spcAft>
+                <a:spcPts val="576"/>
+              </a:spcAft>
+            </a:pPr>
+            <a:r>
+              <a:rPr sz="1400">
+                <a:solidFill>
+                  <a:srgbClr val="555555"/>
+                </a:solidFill>
+                <a:latin typeface="Calibri"/>
+              </a:rPr>
+              <a:t>  -  Not production-hardened  -  no audit trail, no SSO, no rate limits</a:t>
+            </a:r>
+          </a:p>
+          <a:p>
+            <a:pPr algn="l" lvl="1">
+              <a:spcAft>
+                <a:spcPts val="576"/>
+              </a:spcAft>
+            </a:pPr>
+            <a:r>
+              <a:rPr sz="1400">
+                <a:solidFill>
+                  <a:srgbClr val="555555"/>
+                </a:solidFill>
+                <a:latin typeface="Calibri"/>
+              </a:rPr>
+              <a:t>  -  Not validated against the full PACS / CAMT / MT schema library</a:t>
+            </a:r>
+          </a:p>
+          <a:p>
+            <a:pPr algn="l" lvl="1">
+              <a:spcAft>
+                <a:spcPts val="576"/>
+              </a:spcAft>
+            </a:pPr>
+            <a:r>
+              <a:rPr sz="1400">
+                <a:solidFill>
+                  <a:srgbClr val="555555"/>
+                </a:solidFill>
+                <a:latin typeface="Calibri"/>
+              </a:rPr>
+              <a:t>  -  Not tuned on Deutsche Bank's own repair history  -  uses a general AI model</a:t>
+            </a:r>
+          </a:p>
+          <a:p>
+            <a:pPr algn="l">
+              <a:spcAft>
+                <a:spcPts val="576"/>
+              </a:spcAft>
+            </a:pPr>
+            <a:r>
+              <a:rPr sz="1700">
+                <a:solidFill>
+                  <a:srgbClr val="202020"/>
+                </a:solidFill>
+                <a:latin typeface="Calibri"/>
+              </a:rPr>
+              <a:t>•  Goal of today is to show the direction and gather feedback, not to propose immediate rollout</a:t>
+            </a:r>
+          </a:p>
+        </p:txBody>
+      </p:sp>
+      <p:sp>
+        <p:nvSpPr>
+          <p:cNvPr id="5" name="TextBox 4"/>
           <p:cNvSpPr txBox="1"/>
           <p:nvPr/>
         </p:nvSpPr>
@@ -5821,7 +6276,7 @@
                   <a:srgbClr val="555555"/>
                 </a:solidFill>
               </a:rPr>
-              <a:t>8 / 12</a:t>
+              <a:t>8 / 11</a:t>
             </a:r>
           </a:p>
         </p:txBody>
@@ -5873,7 +6328,7 @@
                 </a:solidFill>
                 <a:latin typeface="Calibri"/>
               </a:rPr>
-              <a:t>Example  -  Explain It To Me</a:t>
+              <a:t>Where This Could Go Next</a:t>
             </a:r>
           </a:p>
         </p:txBody>
@@ -5922,45 +6377,16 @@
           </a:p>
         </p:txBody>
       </p:sp>
-      <p:pic>
-        <p:nvPicPr>
-          <p:cNvPr id="4" name="Picture 3" descr="05_explanation.png"/>
-          <p:cNvPicPr>
-            <a:picLocks noChangeAspect="1"/>
-          </p:cNvPicPr>
-          <p:nvPr/>
-        </p:nvPicPr>
-        <p:blipFill>
-          <a:blip r:embed="rId2"/>
-          <a:stretch>
-            <a:fillRect/>
-          </a:stretch>
-        </p:blipFill>
-        <p:spPr>
-          <a:xfrm>
-            <a:off x="2524760" y="1554480"/>
-            <a:ext cx="7112000" cy="4572000"/>
-          </a:xfrm>
-          <a:prstGeom prst="rect">
-            <a:avLst/>
-          </a:prstGeom>
-          <a:ln w="9525">
-            <a:solidFill>
-              <a:srgbClr val="CCCCCC"/>
-            </a:solidFill>
-          </a:ln>
-        </p:spPr>
-      </p:pic>
-      <p:sp>
-        <p:nvSpPr>
-          <p:cNvPr id="5" name="TextBox 4"/>
+      <p:sp>
+        <p:nvSpPr>
+          <p:cNvPr id="4" name="TextBox 3"/>
           <p:cNvSpPr txBox="1"/>
           <p:nvPr/>
         </p:nvSpPr>
         <p:spPr>
           <a:xfrm>
-            <a:off x="548640" y="6172200"/>
-            <a:ext cx="11064240" cy="365760"/>
+            <a:off x="731520" y="1645920"/>
+            <a:ext cx="10789920" cy="4754880"/>
           </a:xfrm>
           <a:prstGeom prst="rect">
             <a:avLst/>
@@ -5968,27 +6394,207 @@
           <a:noFill/>
         </p:spPr>
         <p:txBody>
-          <a:bodyPr wrap="none">
+          <a:bodyPr wrap="square">
             <a:spAutoFit/>
           </a:bodyPr>
           <a:lstStyle/>
           <a:p>
-            <a:pPr algn="ctr"/>
-            <a:r>
-              <a:rPr sz="1200" i="1">
+            <a:pPr algn="l">
+              <a:spcAft>
+                <a:spcPts val="450"/>
+              </a:spcAft>
+            </a:pPr>
+            <a:r>
+              <a:rPr sz="1500">
+                <a:solidFill>
+                  <a:srgbClr val="202020"/>
+                </a:solidFill>
+                <a:latin typeface="Calibri"/>
+              </a:rPr>
+              <a:t>•  Production hardening:</a:t>
+            </a:r>
+          </a:p>
+          <a:p>
+            <a:pPr algn="l" lvl="1">
+              <a:spcAft>
+                <a:spcPts val="450"/>
+              </a:spcAft>
+            </a:pPr>
+            <a:r>
+              <a:rPr sz="1200">
                 <a:solidFill>
                   <a:srgbClr val="555555"/>
                 </a:solidFill>
                 <a:latin typeface="Calibri"/>
               </a:rPr>
-              <a:t>The AI explains the change in plain payments language so the operator understands why it was needed.</a:t>
-            </a:r>
-          </a:p>
-        </p:txBody>
-      </p:sp>
-      <p:sp>
-        <p:nvSpPr>
-          <p:cNvPr id="6" name="TextBox 5"/>
+              <a:t>  -  Hook directly into the fatal-payment queue  -  no copy / paste</a:t>
+            </a:r>
+          </a:p>
+          <a:p>
+            <a:pPr algn="l" lvl="1">
+              <a:spcAft>
+                <a:spcPts val="450"/>
+              </a:spcAft>
+            </a:pPr>
+            <a:r>
+              <a:rPr sz="1200">
+                <a:solidFill>
+                  <a:srgbClr val="555555"/>
+                </a:solidFill>
+                <a:latin typeface="Calibri"/>
+              </a:rPr>
+              <a:t>  -  Push approved repairs back into the workflow</a:t>
+            </a:r>
+          </a:p>
+          <a:p>
+            <a:pPr algn="l">
+              <a:spcAft>
+                <a:spcPts val="450"/>
+              </a:spcAft>
+            </a:pPr>
+            <a:r>
+              <a:rPr sz="1500">
+                <a:solidFill>
+                  <a:srgbClr val="202020"/>
+                </a:solidFill>
+                <a:latin typeface="Calibri"/>
+              </a:rPr>
+              <a:t>•  Better quality controls:</a:t>
+            </a:r>
+          </a:p>
+          <a:p>
+            <a:pPr algn="l" lvl="1">
+              <a:spcAft>
+                <a:spcPts val="450"/>
+              </a:spcAft>
+            </a:pPr>
+            <a:r>
+              <a:rPr sz="1200">
+                <a:solidFill>
+                  <a:srgbClr val="555555"/>
+                </a:solidFill>
+                <a:latin typeface="Calibri"/>
+              </a:rPr>
+              <a:t>  -  Schema-aware validation on top of the AI output</a:t>
+            </a:r>
+          </a:p>
+          <a:p>
+            <a:pPr algn="l" lvl="1">
+              <a:spcAft>
+                <a:spcPts val="450"/>
+              </a:spcAft>
+            </a:pPr>
+            <a:r>
+              <a:rPr sz="1200">
+                <a:solidFill>
+                  <a:srgbClr val="555555"/>
+                </a:solidFill>
+                <a:latin typeface="Calibri"/>
+              </a:rPr>
+              <a:t>  -  Confidence-tiered routing  -  high confidence to second eye, low confidence escalates</a:t>
+            </a:r>
+          </a:p>
+          <a:p>
+            <a:pPr algn="l">
+              <a:spcAft>
+                <a:spcPts val="450"/>
+              </a:spcAft>
+            </a:pPr>
+            <a:r>
+              <a:rPr sz="1500">
+                <a:solidFill>
+                  <a:srgbClr val="202020"/>
+                </a:solidFill>
+                <a:latin typeface="Calibri"/>
+              </a:rPr>
+              <a:t>•  Broader coverage:</a:t>
+            </a:r>
+          </a:p>
+          <a:p>
+            <a:pPr algn="l" lvl="1">
+              <a:spcAft>
+                <a:spcPts val="450"/>
+              </a:spcAft>
+            </a:pPr>
+            <a:r>
+              <a:rPr sz="1200">
+                <a:solidFill>
+                  <a:srgbClr val="555555"/>
+                </a:solidFill>
+                <a:latin typeface="Calibri"/>
+              </a:rPr>
+              <a:t>  -  All payment formats  -  PACS, CAMT, MT, FedWire, CHIPS</a:t>
+            </a:r>
+          </a:p>
+          <a:p>
+            <a:pPr algn="l" lvl="1">
+              <a:spcAft>
+                <a:spcPts val="450"/>
+              </a:spcAft>
+            </a:pPr>
+            <a:r>
+              <a:rPr sz="1200">
+                <a:solidFill>
+                  <a:srgbClr val="555555"/>
+                </a:solidFill>
+                <a:latin typeface="Calibri"/>
+              </a:rPr>
+              <a:t>  -  Format-specific tuning, owned by HVP operations</a:t>
+            </a:r>
+          </a:p>
+          <a:p>
+            <a:pPr algn="l">
+              <a:spcAft>
+                <a:spcPts val="450"/>
+              </a:spcAft>
+            </a:pPr>
+            <a:r>
+              <a:rPr sz="1500">
+                <a:solidFill>
+                  <a:srgbClr val="202020"/>
+                </a:solidFill>
+                <a:latin typeface="Calibri"/>
+              </a:rPr>
+              <a:t>•  Longer term:</a:t>
+            </a:r>
+          </a:p>
+          <a:p>
+            <a:pPr algn="l" lvl="1">
+              <a:spcAft>
+                <a:spcPts val="450"/>
+              </a:spcAft>
+            </a:pPr>
+            <a:r>
+              <a:rPr sz="1200">
+                <a:solidFill>
+                  <a:srgbClr val="555555"/>
+                </a:solidFill>
+                <a:latin typeface="Calibri"/>
+              </a:rPr>
+              <a:t>  -  Fine-tune a model on Deutsche Bank's own anonymised repair history</a:t>
+            </a:r>
+          </a:p>
+          <a:p>
+            <a:pPr algn="l" lvl="1">
+              <a:spcAft>
+                <a:spcPts val="450"/>
+              </a:spcAft>
+            </a:pPr>
+            <a:r>
+              <a:rPr sz="1200">
+                <a:solidFill>
+                  <a:srgbClr val="555555"/>
+                </a:solidFill>
+                <a:latin typeface="Calibri"/>
+              </a:rPr>
+              <a:t>  -  Pre-emptive screening  -  catch fatals on outbound payments before they hit CSM</a:t>
+            </a:r>
+          </a:p>
+        </p:txBody>
+      </p:sp>
+      <p:sp>
+        <p:nvSpPr>
+          <p:cNvPr id="5" name="TextBox 4"/>
           <p:cNvSpPr txBox="1"/>
           <p:nvPr/>
         </p:nvSpPr>
@@ -6015,7 +6621,7 @@
                   <a:srgbClr val="555555"/>
                 </a:solidFill>
               </a:rPr>
-              <a:t>9 / 12</a:t>
+              <a:t>9 / 11</a:t>
             </a:r>
           </a:p>
         </p:txBody>
